--- a/en/slides/19-Computer_Architecture-Instructions_and_Interrupts.pptx
+++ b/en/slides/19-Computer_Architecture-Instructions_and_Interrupts.pptx
@@ -126,26 +126,26 @@
   <p:extLst>
     <p:ext uri="{521415D9-36F7-43E2-AB2F-B90AF26B5E84}">
       <p14:sectionLst xmlns:p14="http://schemas.microsoft.com/office/powerpoint/2010/main">
-        <p14:section name="Opening" id="{6a84a7d2-913a-8a6c-7ccf-e1ea70c18ced}">
+        <p14:section name="Opening" id="{3539471a-a354-af0d-db9a-e98e9269e617}">
           <p14:sldIdLst>
             <p14:sldId id="256"/>
             <p14:sldId id="257"/>
           </p14:sldIdLst>
         </p14:section>
-        <p14:section name="Instructions" id="{8b45628e-031b-e973-33ed-82d449419ead}">
+        <p14:section name="Instructions" id="{9cbf1771-1184-1f9c-4915-04cff56b697d}">
           <p14:sldIdLst>
             <p14:sldId id="258"/>
             <p14:sldId id="259"/>
             <p14:sldId id="260"/>
           </p14:sldIdLst>
         </p14:section>
-        <p14:section name="The processor cycle" id="{553ec27d-88c0-17b1-40d2-47c24d189596}">
+        <p14:section name="The processor cycle" id="{8588cb9d-c22b-48af-8f54-54b4c0f2d91b}">
           <p14:sldIdLst>
             <p14:sldId id="261"/>
             <p14:sldId id="262"/>
           </p14:sldIdLst>
         </p14:section>
-        <p14:section name="Interrupts" id="{69ab9ba3-b130-78d5-b80a-50c6230f5e7e}">
+        <p14:section name="Interrupts" id="{da8300d8-5f8d-2ab4-5e73-6cafa7814db9}">
           <p14:sldIdLst>
             <p14:sldId id="263"/>
             <p14:sldId id="264"/>
@@ -154,7 +154,7 @@
             <p14:sldId id="267"/>
           </p14:sldIdLst>
         </p14:section>
-        <p14:section name="The RISC-V solution" id="{895c0349-01d5-bf8d-e433-6d80b5ba014d}">
+        <p14:section name="The RISC-V solution" id="{824e4421-863f-d033-0a10-d6d4f6c691c4}">
           <p14:sldIdLst>
             <p14:sldId id="268"/>
             <p14:sldId id="269"/>
@@ -1640,7 +1640,7 @@
           <a:p>
             <a:r>
               <a:rPr lang="en-US" dirty="0"/>
-              <a:t>Five conclusions. An instruction is an operation code and its operands; in RISC-V always 32 bits in six regular formats. The length of the instructions determines how the PC moves. The processor has a cycle: fetch, decode, execute, write the result. Exceptional events break the cycle: the processor saves where it was, serves the event and resumes. Interrupts can be enabled, masked and ordered by priority, and RISC-V does it with a handful of registers and mret. The next lecture leaves the processor for the buses and the video card.
+              <a:t>Five conclusions. An instruction is an operation code and its operands; in RISC-V always 32 bits in six regular formats. A fixed length keeps the fetch simple: the PC advances by a constant, 4 for an instruction that is not compressed. The processor has a cycle: fetch, decode, execute, write the result. Exceptional events break the cycle: the processor saves where it was, serves the event and resumes. Interrupts can be enabled, masked and ordered by priority, and RISC-V does it with a handful of registers and mret. The next lecture leaves the processor for the buses and the video card.
 For the lecturer: The original conclusions stated that 'the interrupt is a non-maskable signal': most interrupts can be masked; only a few cannot. Next lecture: buses and the video card.</a:t>
             </a:r>
             <a:endParaRPr lang="en-US" dirty="0"/>
@@ -3294,7 +3294,63 @@
       </p:sp>
       <p:sp>
         <p:nvSpPr>
-          <p:cNvPr id="12" name="Shape 10"/>
+          <p:cNvPr id="12" name="Text 10"/>
+          <p:cNvSpPr txBox="1"/>
+          <p:nvPr/>
+        </p:nvSpPr>
+        <p:spPr>
+          <a:xfrm>
+            <a:off x="4693615" y="566928"/>
+            <a:ext cx="6949440" cy="640080"/>
+          </a:xfrm>
+          <a:prstGeom prst="rect">
+            <a:avLst/>
+          </a:prstGeom>
+          <a:noFill/>
+          <a:ln/>
+        </p:spPr>
+        <p:txBody>
+          <a:bodyPr wrap="square" lIns="0" tIns="0" rIns="0" bIns="0" rtlCol="0" anchor="t"/>
+          <a:lstStyle/>
+          <a:p>
+            <a:pPr algn="r" indent="0" marL="0">
+              <a:buNone/>
+            </a:pPr>
+            <a:r>
+              <a:rPr lang="en-US" sz="1300" dirty="0">
+                <a:solidFill>
+                  <a:srgbClr val="CFE3EA"/>
+                </a:solidFill>
+                <a:latin typeface="Calibri" pitchFamily="34" charset="0"/>
+                <a:ea typeface="Calibri" pitchFamily="34" charset="-122"/>
+                <a:cs typeface="Calibri" pitchFamily="34" charset="-120"/>
+              </a:rPr>
+              <a:t>Lecture deck. The listings, the complete program and how to test it are in the code deck:</a:t>
+            </a:r>
+            <a:endParaRPr lang="en-US" sz="1300" dirty="0"/>
+          </a:p>
+          <a:p>
+            <a:pPr algn="r" indent="0" marL="0">
+              <a:buNone/>
+            </a:pPr>
+            <a:r>
+              <a:rPr lang="en-US" sz="1300" dirty="0">
+                <a:solidFill>
+                  <a:srgbClr val="CFE3EA"/>
+                </a:solidFill>
+                <a:latin typeface="Calibri" pitchFamily="34" charset="0"/>
+                <a:ea typeface="Calibri" pitchFamily="34" charset="-122"/>
+                <a:cs typeface="Calibri" pitchFamily="34" charset="-120"/>
+              </a:rPr>
+              <a:t>19-Computer_Architecture-Instructions_and_Interrupts-Code.pptx</a:t>
+            </a:r>
+            <a:endParaRPr lang="en-US" sz="1300" dirty="0"/>
+          </a:p>
+        </p:txBody>
+      </p:sp>
+      <p:sp>
+        <p:nvSpPr>
+          <p:cNvPr id="13" name="Shape 11"/>
           <p:cNvSpPr/>
           <p:nvPr/>
         </p:nvSpPr>
@@ -3321,7 +3377,7 @@
       </p:sp>
       <p:pic>
         <p:nvPicPr>
-          <p:cNvPr id="13" name="Image 0" descr="/Users/raffaelemontella/devel/riscv-prg32/computer-architecture-with-prg32/tools/assets/game_asteroids.png">    </p:cNvPr>
+          <p:cNvPr id="14" name="Image 0" descr="/Users/raffaelemontella/devel/riscv-prg32/computer-architecture-with-prg32/tools/assets/game_asteroids.png">    </p:cNvPr>
           <p:cNvPicPr>
             <a:picLocks noChangeAspect="1"/>
           </p:cNvPicPr>
@@ -15820,7 +15876,7 @@
         </p:nvSpPr>
         <p:spPr>
           <a:xfrm>
-            <a:off x="548640" y="2280793"/>
+            <a:off x="548640" y="2221916"/>
             <a:ext cx="146304" cy="146304"/>
           </a:xfrm>
           <a:prstGeom prst="rect">
@@ -15845,8 +15901,8 @@
         </p:nvSpPr>
         <p:spPr>
           <a:xfrm>
-            <a:off x="932688" y="2197608"/>
-            <a:ext cx="10710367" cy="294386"/>
+            <a:off x="932688" y="2138731"/>
+            <a:ext cx="10710367" cy="588772"/>
           </a:xfrm>
           <a:prstGeom prst="rect">
             <a:avLst/>
@@ -15873,7 +15929,7 @@
                 <a:ea typeface="Calibri" pitchFamily="34" charset="-122"/>
                 <a:cs typeface="Calibri" pitchFamily="34" charset="-120"/>
               </a:rPr>
-              <a:t>The length of the instructions, fixed or variable, determines how the PC behaves</a:t>
+              <a:t>A fixed length keeps the fetch simple: the PC advances by a constant, 4 for an instruction that is not compressed</a:t>
             </a:r>
             <a:endParaRPr lang="en-US" sz="1900" dirty="0"/>
           </a:p>
@@ -15887,7 +15943,7 @@
         </p:nvSpPr>
         <p:spPr>
           <a:xfrm>
-            <a:off x="548640" y="2766695"/>
+            <a:off x="548640" y="2943327"/>
             <a:ext cx="146304" cy="146304"/>
           </a:xfrm>
           <a:prstGeom prst="rect">
@@ -15912,7 +15968,7 @@
         </p:nvSpPr>
         <p:spPr>
           <a:xfrm>
-            <a:off x="932688" y="2683510"/>
+            <a:off x="932688" y="2860142"/>
             <a:ext cx="10710367" cy="588772"/>
           </a:xfrm>
           <a:prstGeom prst="rect">
@@ -15954,7 +16010,7 @@
         </p:nvSpPr>
         <p:spPr>
           <a:xfrm>
-            <a:off x="548640" y="3546983"/>
+            <a:off x="548640" y="3664737"/>
             <a:ext cx="146304" cy="146304"/>
           </a:xfrm>
           <a:prstGeom prst="rect">
@@ -15979,7 +16035,7 @@
         </p:nvSpPr>
         <p:spPr>
           <a:xfrm>
-            <a:off x="932688" y="3463798"/>
+            <a:off x="932688" y="3581552"/>
             <a:ext cx="10710367" cy="588772"/>
           </a:xfrm>
           <a:prstGeom prst="rect">
@@ -16021,7 +16077,7 @@
         </p:nvSpPr>
         <p:spPr>
           <a:xfrm>
-            <a:off x="548640" y="4327271"/>
+            <a:off x="548640" y="4386148"/>
             <a:ext cx="146304" cy="146304"/>
           </a:xfrm>
           <a:prstGeom prst="rect">
@@ -16046,7 +16102,7 @@
         </p:nvSpPr>
         <p:spPr>
           <a:xfrm>
-            <a:off x="932688" y="4244086"/>
+            <a:off x="932688" y="4302963"/>
             <a:ext cx="10710367" cy="588772"/>
           </a:xfrm>
           <a:prstGeom prst="rect">

--- a/en/slides/19-Computer_Architecture-Instructions_and_Interrupts.pptx
+++ b/en/slides/19-Computer_Architecture-Instructions_and_Interrupts.pptx
@@ -126,26 +126,26 @@
   <p:extLst>
     <p:ext uri="{521415D9-36F7-43E2-AB2F-B90AF26B5E84}">
       <p14:sectionLst xmlns:p14="http://schemas.microsoft.com/office/powerpoint/2010/main">
-        <p14:section name="Opening" id="{3539471a-a354-af0d-db9a-e98e9269e617}">
+        <p14:section name="Opening" id="{69afaa70-9597-56d3-001c-8191b74d8ff4}">
           <p14:sldIdLst>
             <p14:sldId id="256"/>
             <p14:sldId id="257"/>
           </p14:sldIdLst>
         </p14:section>
-        <p14:section name="Instructions" id="{9cbf1771-1184-1f9c-4915-04cff56b697d}">
+        <p14:section name="Instructions" id="{f81a6806-5b8d-7df8-92af-9a764801f7db}">
           <p14:sldIdLst>
             <p14:sldId id="258"/>
             <p14:sldId id="259"/>
             <p14:sldId id="260"/>
           </p14:sldIdLst>
         </p14:section>
-        <p14:section name="The processor cycle" id="{8588cb9d-c22b-48af-8f54-54b4c0f2d91b}">
+        <p14:section name="The processor cycle" id="{f133f11c-f53b-8b8e-f4a4-7210691adf03}">
           <p14:sldIdLst>
             <p14:sldId id="261"/>
             <p14:sldId id="262"/>
           </p14:sldIdLst>
         </p14:section>
-        <p14:section name="Interrupts" id="{da8300d8-5f8d-2ab4-5e73-6cafa7814db9}">
+        <p14:section name="Interrupts" id="{4ba9ed9a-08c2-e658-62b9-cb6d2dd8e2b5}">
           <p14:sldIdLst>
             <p14:sldId id="263"/>
             <p14:sldId id="264"/>
@@ -154,7 +154,7 @@
             <p14:sldId id="267"/>
           </p14:sldIdLst>
         </p14:section>
-        <p14:section name="The RISC-V solution" id="{824e4421-863f-d033-0a10-d6d4f6c691c4}">
+        <p14:section name="The RISC-V solution" id="{7f145f83-5aae-3444-4197-1832d3c61477}">
           <p14:sldIdLst>
             <p14:sldId id="268"/>
             <p14:sldId id="269"/>
@@ -571,6 +571,8 @@
             <a:r>
               <a:rPr lang="en-US" dirty="0"/>
               <a:t>The previous lecture described what a processor is made of. This one describes what it does. It has two halves. The first follows a single instruction: how it is encoded in 32 bits and which steps the processor takes to carry it out. The second explains what happens when something more urgent than the current program arrives, a timer, a device, an error, and the processor must leave what it is doing and come back later. The joke on the cover is nearly true, as you will see.
+Learning status: UNDERSTAND NOW, by the end of this lecture you explain it, trace it and apply it on your own; USE NOW, you follow and use the recipe today; how it works inside is explained later, or is not part of the course; UNDERSTAND LATER, recognise the name and what it is for; a later lecture explains it. A slide without a badge is context: a story, an example, a question, an exercise.
+Learning status of this lecture. UNDERSTAND NOW: instruction formats; addressing modes; the processor cycle; interrupts and traps. USE NOW: the complete program, the PRG32 tools (used, not studied, in this course). UNDERSTAND LATER: nothing. A slide without a badge is context: a story, an example, a question, an exercise.
 For the lecturer: The original deck used a 16-bit word machine for the fetch phase and the Motorola MC68000 for vectored interrupts and priorities. Both are replaced by RISC-V: the six instruction formats, the five classic stages, and the machine-mode trap mechanism (mtvec, mepc, mcause, mstatus, mret). A comparison slide keeps the 68000 as the historical counterpart.</a:t>
             </a:r>
             <a:endParaRPr lang="en-US" dirty="0"/>
@@ -660,6 +662,7 @@
             <a:r>
               <a:rPr lang="en-US" dirty="0"/>
               <a:t>The real cycle. After the bootstrap the processor fetches, decodes and executes; then, at the end of every instruction, it checks whether an interrupt is pending. If not, it goes back to fetch. If so, it takes the trap: it passes to the privileged state and starts executing a routine of the system, the handler. When the handler finishes, the suspended program resumes as if nothing had happened. Follow the two paths on the diagram: the short loop is the normal case.
+UNDERSTAND NOW: interrupts and traps.
 For the lecturer: Ciclo del processore reale. In RISC-V 'supervisor state' is machine mode, and the first instruction fetched after the trap is the one at the address in mtvec.</a:t>
             </a:r>
             <a:endParaRPr lang="en-US" dirty="0"/>
@@ -749,6 +752,7 @@
             <a:r>
               <a:rPr lang="en-US" dirty="0"/>
               <a:t>Six causes of interruption. A periodic interrupt from a timer, to share the processor among programs. An I/O interrupt, with which a peripheral reports that it is ready. Errors in the program, such as an instruction that does not exist: these are the exceptions. Faults of the system: power, temperature. Reset, which brings everything back to a known state. And the software interrupt, with which a program asks the operating system for a service: in RISC-V it is the instruction ecall.
+UNDERSTAND NOW: interrupts and traps.
 For the lecturer: The original deck lists arithmetic overflow among the program errors: in RISC-V integer overflow does not raise an exception (Lecture 05). ecall, environment call, is synchronous with the program that executes it.</a:t>
             </a:r>
             <a:endParaRPr lang="en-US" dirty="0"/>
@@ -838,6 +842,7 @@
             <a:r>
               <a:rPr lang="en-US" dirty="0"/>
               <a:t>The general procedure in six steps. Save the context, hardware part: at least the address at which to resume. Identify the cause. Jump to the entry point of the interrupt service routine. Save the context, software part: the registers the routine is going to use. Serve the interrupt. Finally restore the context and resume the suspended program at the instruction after the last one executed. The context is everything that the interrupted program needs to find unchanged.
+UNDERSTAND NOW: interrupts and traps.
 For the lecturer: Gestione delle interruzioni. The state to save and restore: PC, status, and the registers. Saving can be done partly or wholly in hardware or in software; RISC-V does the minimum in hardware. With several devices the processor must identify who interrupted and, for simultaneous requests, apply a priority.</a:t>
             </a:r>
             <a:endParaRPr lang="en-US" dirty="0"/>
@@ -927,6 +932,7 @@
             <a:r>
               <a:rPr lang="en-US" dirty="0"/>
               <a:t>Six registers. mtvec, written once by the firmware, holds the address of the trap handler. mstatus contains MIE, the global interrupt enable, and MPIE, its previous value. mie has one enable bit for each source, mip one pending bit for each source. mepc receives, at each trap, the address of the interrupted instruction. mcause receives the cause. The middle column matters: some registers are written by the firmware to configure the mechanism, others by the hardware when a trap occurs.
+UNDERSTAND NOW: interrupts and traps.
 For the lecturer: Machine-mode control and status registers (Lecture 18). An interrupt is taken only if its bit is set in both mip and mie and MIE is 1.</a:t>
             </a:r>
             <a:endParaRPr lang="en-US" dirty="0"/>
@@ -1016,6 +1022,7 @@
             <a:r>
               <a:rPr lang="en-US" dirty="0"/>
               <a:t>What the hardware does at a trap, in order. It writes in mepc the address of the interrupted instruction. It writes the cause in mcause. It copies MIE into MPIE and clears MIE, so that further interrupts are disabled. It passes to machine mode. It loads the PC with the address in mtvec. Nothing is saved on a stack: the general registers are left to the handler. The instruction mret, at the end of the handler, undoes everything: MIE gets MPIE back and the PC gets mepc.
+UNDERSTAND NOW: interrupts and traps.
 For the lecturer: Nothing is pushed on a stack by the hardware: saving the general registers is left to the handler. This is the 'hardware context save' of the general scheme, reduced to two registers and one bit.</a:t>
             </a:r>
             <a:endParaRPr lang="en-US" dirty="0"/>
@@ -1105,6 +1112,7 @@
             <a:r>
               <a:rPr lang="en-US" dirty="0"/>
               <a:t>The content of mcause. The top bit says whether it was an interrupt or an exception; the rest is a code. The three interrupts, highlighted: software, timer, and external, that is a device. Among the exceptions: illegal instruction, breakpoint, access fault on a load or a store, and ecall. The same number can appear in both families with different meanings, which is why the top bit is needed. The breakpoint row explains how a debugger such as that of PRG32-QT stops your program.
+UNDERSTAND NOW: interrupts and traps.
 For the lecturer: The standard codes of the privileged specification; chips add their own. The same code 3 means different things for interrupts and exceptions: the top bit of mcause distinguishes them. With mtvec in vectored mode, a timer interrupt enters at base + 4 x 7.</a:t>
             </a:r>
             <a:endParaRPr lang="en-US" dirty="0"/>
@@ -1194,6 +1202,7 @@
             <a:r>
               <a:rPr lang="en-US" dirty="0"/>
               <a:t>All of this happens on the kit. A timer interrupts the processor a hundred times per second, and the firmware uses it to keep time and pace the frames. The display and the audio interrupt when they want more data. The radio interrupts when a packet arrives, which is why you can upload a cartridge while a game runs. Your init, update and draw are ordinary functions that run between interrupts. And a cartridge stuck in a loop does not stop the interrupts: PRG32-QT reports an error; on the board a watchdog reports the stall.
+UNDERSTAND NOW: interrupts and traps.
 For the lecturer: The three problems of the simple cycle (inefficient I/O, runaway programs, limited control) and their solution, all visible on the kit. Checked against the firmware sources and configuration (not on a physical board): the cartridge runs natively inside the main task, in the same privilege mode as the firmware; FreeRTOS ticks at 100 Hz; the task watchdog (5 s, watching the idle task) only prints a warning on the serial port, because the panic option is off, so a stuck cartridge keeps the cartridge lock and the kit needs a reset. A cartridge that disabled interrupts would instead trip the interrupt watchdog (300 ms), which panics and restarts the chip. Run on PRG32-QT: an endless loop gives 'instruction budget exhausted', a write to mstatus gives 'unsupported CSR'. In PRG32-QT a breakpoint is the exception with code 3.</a:t>
             </a:r>
             <a:endParaRPr lang="en-US" dirty="0"/>
@@ -1641,6 +1650,7 @@
             <a:r>
               <a:rPr lang="en-US" dirty="0"/>
               <a:t>Five conclusions. An instruction is an operation code and its operands; in RISC-V always 32 bits in six regular formats. A fixed length keeps the fetch simple: the PC advances by a constant, 4 for an instruction that is not compressed. The processor has a cycle: fetch, decode, execute, write the result. Exceptional events break the cycle: the processor saves where it was, serves the event and resumes. Interrupts can be enabled, masked and ordered by priority, and RISC-V does it with a handful of registers and mret. The next lecture leaves the processor for the buses and the video card.
+Learning status, recap. UNDERSTAND NOW: instruction formats; addressing modes; the processor cycle; interrupts and traps. USE NOW: the complete program, the PRG32 tools (used, not studied, in this course). UNDERSTAND LATER: nothing. A slide without a badge is context: a story, an example, a question, an exercise.
 For the lecturer: The original conclusions stated that 'the interrupt is a non-maskable signal': most interrupts can be masked; only a few cannot. Next lecture: buses and the video card.</a:t>
             </a:r>
             <a:endParaRPr lang="en-US" dirty="0"/>
@@ -1730,6 +1740,7 @@
             <a:r>
               <a:rPr lang="en-US" dirty="0"/>
               <a:t>Every processor has four families of instructions: transfers between memory and registers, arithmetic and logic, control of flow, and input/output. An instruction is an operation code, the opcode, which says what to do, followed by zero or more operands, which say on what. An operand can be a constant written inside the instruction, an immediate; a memory location; or a register. Some operands are implicit: an accumulator machine does not name the accumulator. Instructions have from zero to three operands.
+UNDERSTAND NOW: instruction formats.
 For the lecturer: In RISC-V the fourth family does not exist as such: devices are memory (Lecture 15). add has three operands, all registers; ret has none visible.</a:t>
             </a:r>
             <a:endParaRPr lang="en-US" dirty="0"/>
@@ -1819,6 +1830,7 @@
             <a:r>
               <a:rPr lang="en-US" dirty="0"/>
               <a:t>The formats of RISC-V. All instructions are 32 bits long, divided into fields. In the R format, for operations between registers, there are three register numbers of five bits, rs1, rs2 and rd, and three fields that select the operation. In the I format the second source register is replaced by a 12-bit immediate. S and B, for stores and branches, split the immediate in two pieces. U and J carry a 20-bit immediate. Notice the regularity: the opcode is always in the lowest seven bits, and the registers are always in the same positions.
+UNDERSTAND NOW: instruction formats.
 For the lecturer: Bits 31 down to 0, left to right (indices shown on the first row). B and J differ from S and U only in how the bits of the immediate are arranged. This regularity is the heart of the RISC idea; the generic 0-, 1-, 2- and 3-operand formats of the original deck are its ancestors.</a:t>
             </a:r>
             <a:endParaRPr lang="en-US" dirty="0"/>
@@ -1908,6 +1920,7 @@
             <a:r>
               <a:rPr lang="en-US" dirty="0"/>
               <a:t>An addressing mode is a way of finding an operand. RISC-V has four. Immediate: the operand is a constant inside the instruction. Register: it is the content of a register. Base plus displacement: it is the memory word at the address given by a register plus a constant, the only way to reach memory. PC-relative: an address at a certain distance from the instruction itself, used by branches. Memory-indirect addressing, where the address itself is in memory, does not exist: it takes two loads.
+UNDERSTAND NOW: addressing modes.
 For the lecturer: RISC-V has only the first four. A CISC processor such as the MC68000 has a dozen, including memory-indirect and auto-increment modes. The example of the original deck, R3 := M[M[A]], becomes in RISC-V: lw t0, 0(t1) followed by lw t0, 0(t0). The 'operand assembly' phase of a CISC processor is the price of rich addressing modes.</a:t>
             </a:r>
             <a:endParaRPr lang="en-US" dirty="0"/>
@@ -1997,6 +2010,7 @@
             <a:r>
               <a:rPr lang="en-US" dirty="0"/>
               <a:t>Five phases. Fetch: the instruction at the address in the PC is read from memory, and the PC advances. Decode: the opcode is recognised and the registers named in the instruction are read. Execute: the ALU computes a result, an address or a comparison. Memory: loads read the memory, stores write it, the other instructions do nothing here. Write back: the result is written in the destination register. After the initial bootstrap, the processor repeats this cycle for ever.
+UNDERSTAND NOW: the processor cycle.
 For the lecturer: Algoritmo fondamentale del processore: inizializzazione, instruction fetch and decoding, operand assembly, execute. The five-phase version is the classic RISC formulation.</a:t>
             </a:r>
             <a:endParaRPr lang="en-US" dirty="0"/>
@@ -2086,6 +2100,7 @@
             <a:r>
               <a:rPr lang="en-US" dirty="0"/>
               <a:t>If each phase has its own hardware, the phases of different instructions can overlap. In the table, each row is an instruction and each column a clock cycle: while the first instruction is in execution, the second is being decoded and the third fetched. Each instruction still takes five cycles, but one finishes at every cycle: this is the pipeline, the same idea as an assembly line. Superscalar processors put several pipelines side by side. The main core of the kit has a pipeline of four stages.
+UNDERSTAND NOW: the processor cycle.
 For the lecturer: Source slide: «Esempio di pipeline lineare a 5 stadi; superscalarità». IF instruction fetch, ID decode, EX execute, MEM memory, WB write back. Branches and dependences between neighbouring instructions complicate the picture (hazards): the subject of an advanced course.</a:t>
             </a:r>
             <a:endParaRPr lang="en-US" dirty="0"/>
@@ -2175,6 +2190,7 @@
             <a:r>
               <a:rPr lang="en-US" dirty="0"/>
               <a:t>A processor that only fetched, decoded and executed would have three problems. Communication with devices would be inefficient: the program would have to keep asking each device whether it has something to say. A program that entered an endless loop by mistake, like the j loop on the slide, could never be removed. And the operating system would have little control over the machine. All three have the same solution: a way to take the processor away from the running program.
+UNDERSTAND NOW: interrupts and traps.
 For the lecturer: Source slide: «Ciclo del processore semplificato»: bootstrap, fetch, operand assembly, execute.</a:t>
             </a:r>
             <a:endParaRPr lang="en-US" dirty="0"/>
@@ -2264,6 +2280,7 @@
             <a:r>
               <a:rPr lang="en-US" dirty="0"/>
               <a:t>The definition: interrupts are exceptional events, usually asynchronous with respect to the program in execution, that require the attention of the processor. RISC-V uses three distinct words. An interrupt comes from outside the program, at any moment: a timer, a device. An exception is caused by the instruction being executed: an illegal opcode, a forbidden address. A trap is the transfer of control to a handler, whatever caused it. Other processors use these words more loosely.
+UNDERSTAND NOW: interrupts and traps.
 For the lecturer: Interrupt o interruzioni. Older processors and the original deck call 'traps' the synchronous events and use 'interrupt' for everything; the RISC-V specification uses the three words precisely.</a:t>
             </a:r>
             <a:endParaRPr lang="en-US" dirty="0"/>
@@ -3401,6 +3418,420 @@
       </p:pic>
       <p:sp>
         <p:nvSpPr>
+          <p:cNvPr id="15" name="Shape 12"/>
+          <p:cNvSpPr/>
+          <p:nvPr/>
+        </p:nvSpPr>
+        <p:spPr>
+          <a:xfrm>
+            <a:off x="9690303" y="91440"/>
+            <a:ext cx="1952752" cy="274320"/>
+          </a:xfrm>
+          <a:prstGeom prst="rect">
+            <a:avLst/>
+          </a:prstGeom>
+          <a:solidFill>
+            <a:srgbClr val="F3E8FF"/>
+          </a:solidFill>
+          <a:ln w="12700">
+            <a:solidFill>
+              <a:srgbClr val="7E22CE"/>
+            </a:solidFill>
+            <a:prstDash val="dash"/>
+          </a:ln>
+        </p:spPr>
+      </p:sp>
+      <p:sp>
+        <p:nvSpPr>
+          <p:cNvPr id="16" name="Shape 13"/>
+          <p:cNvSpPr/>
+          <p:nvPr/>
+        </p:nvSpPr>
+        <p:spPr>
+          <a:xfrm>
+            <a:off x="9717735" y="128016"/>
+            <a:ext cx="45720" cy="45720"/>
+          </a:xfrm>
+          <a:prstGeom prst="rect">
+            <a:avLst/>
+          </a:prstGeom>
+          <a:solidFill>
+            <a:srgbClr val="7E22CE"/>
+          </a:solidFill>
+          <a:ln w="12700">
+            <a:solidFill>
+              <a:srgbClr val="7E22CE"/>
+            </a:solidFill>
+            <a:prstDash val="solid"/>
+          </a:ln>
+        </p:spPr>
+      </p:sp>
+      <p:sp>
+        <p:nvSpPr>
+          <p:cNvPr id="17" name="Shape 14"/>
+          <p:cNvSpPr/>
+          <p:nvPr/>
+        </p:nvSpPr>
+        <p:spPr>
+          <a:xfrm>
+            <a:off x="9717735" y="205740"/>
+            <a:ext cx="45720" cy="45720"/>
+          </a:xfrm>
+          <a:prstGeom prst="rect">
+            <a:avLst/>
+          </a:prstGeom>
+          <a:solidFill>
+            <a:srgbClr val="7E22CE"/>
+          </a:solidFill>
+          <a:ln w="12700">
+            <a:solidFill>
+              <a:srgbClr val="7E22CE"/>
+            </a:solidFill>
+            <a:prstDash val="solid"/>
+          </a:ln>
+        </p:spPr>
+      </p:sp>
+      <p:sp>
+        <p:nvSpPr>
+          <p:cNvPr id="18" name="Shape 15"/>
+          <p:cNvSpPr/>
+          <p:nvPr/>
+        </p:nvSpPr>
+        <p:spPr>
+          <a:xfrm>
+            <a:off x="9717735" y="283464"/>
+            <a:ext cx="45720" cy="45720"/>
+          </a:xfrm>
+          <a:prstGeom prst="rect">
+            <a:avLst/>
+          </a:prstGeom>
+          <a:solidFill>
+            <a:srgbClr val="7E22CE"/>
+          </a:solidFill>
+          <a:ln w="12700">
+            <a:solidFill>
+              <a:srgbClr val="7E22CE"/>
+            </a:solidFill>
+            <a:prstDash val="solid"/>
+          </a:ln>
+        </p:spPr>
+      </p:sp>
+      <p:pic>
+        <p:nvPicPr>
+          <p:cNvPr id="19" name="Image 1" descr="preencoded.png">    </p:cNvPr>
+          <p:cNvPicPr>
+            <a:picLocks noChangeAspect="1"/>
+          </p:cNvPicPr>
+          <p:nvPr/>
+        </p:nvPicPr>
+        <p:blipFill>
+          <a:blip r:embed="rId2"/>
+          <a:stretch>
+            <a:fillRect/>
+          </a:stretch>
+        </p:blipFill>
+        <p:spPr>
+          <a:xfrm>
+            <a:off x="9818319" y="128016"/>
+            <a:ext cx="201168" cy="201168"/>
+          </a:xfrm>
+          <a:prstGeom prst="rect">
+            <a:avLst/>
+          </a:prstGeom>
+        </p:spPr>
+      </p:pic>
+      <p:sp>
+        <p:nvSpPr>
+          <p:cNvPr id="20" name="Text 16"/>
+          <p:cNvSpPr txBox="1"/>
+          <p:nvPr/>
+        </p:nvSpPr>
+        <p:spPr>
+          <a:xfrm>
+            <a:off x="10074351" y="91440"/>
+            <a:ext cx="1532128" cy="274320"/>
+          </a:xfrm>
+          <a:prstGeom prst="rect">
+            <a:avLst/>
+          </a:prstGeom>
+          <a:noFill/>
+          <a:ln/>
+        </p:spPr>
+        <p:txBody>
+          <a:bodyPr wrap="square" lIns="0" tIns="0" rIns="0" bIns="0" rtlCol="0" anchor="ctr"/>
+          <a:lstStyle/>
+          <a:p>
+            <a:pPr indent="0" marL="0">
+              <a:buNone/>
+            </a:pPr>
+            <a:r>
+              <a:rPr lang="en-US" sz="1100" b="1" dirty="0">
+                <a:solidFill>
+                  <a:srgbClr val="6B21A8"/>
+                </a:solidFill>
+                <a:latin typeface="Calibri" pitchFamily="34" charset="0"/>
+                <a:ea typeface="Calibri" pitchFamily="34" charset="-122"/>
+                <a:cs typeface="Calibri" pitchFamily="34" charset="-120"/>
+              </a:rPr>
+              <a:t>UNDERSTAND LATER</a:t>
+            </a:r>
+            <a:endParaRPr lang="en-US" sz="1100" dirty="0"/>
+          </a:p>
+        </p:txBody>
+      </p:sp>
+      <p:sp>
+        <p:nvSpPr>
+          <p:cNvPr id="21" name="Shape 17"/>
+          <p:cNvSpPr/>
+          <p:nvPr/>
+        </p:nvSpPr>
+        <p:spPr>
+          <a:xfrm>
+            <a:off x="8407349" y="91440"/>
+            <a:ext cx="1173226" cy="274320"/>
+          </a:xfrm>
+          <a:prstGeom prst="rect">
+            <a:avLst/>
+          </a:prstGeom>
+          <a:solidFill>
+            <a:srgbClr val="FEF3C7"/>
+          </a:solidFill>
+          <a:ln w="12700">
+            <a:solidFill>
+              <a:srgbClr val="B45309"/>
+            </a:solidFill>
+            <a:prstDash val="solid"/>
+          </a:ln>
+        </p:spPr>
+      </p:sp>
+      <p:sp>
+        <p:nvSpPr>
+          <p:cNvPr id="22" name="Shape 18"/>
+          <p:cNvSpPr/>
+          <p:nvPr/>
+        </p:nvSpPr>
+        <p:spPr>
+          <a:xfrm>
+            <a:off x="8407349" y="91440"/>
+            <a:ext cx="27432" cy="274320"/>
+          </a:xfrm>
+          <a:prstGeom prst="rect">
+            <a:avLst/>
+          </a:prstGeom>
+          <a:solidFill>
+            <a:srgbClr val="B45309"/>
+          </a:solidFill>
+          <a:ln w="12700">
+            <a:solidFill>
+              <a:srgbClr val="B45309"/>
+            </a:solidFill>
+            <a:prstDash val="solid"/>
+          </a:ln>
+        </p:spPr>
+      </p:sp>
+      <p:sp>
+        <p:nvSpPr>
+          <p:cNvPr id="23" name="Shape 19"/>
+          <p:cNvSpPr/>
+          <p:nvPr/>
+        </p:nvSpPr>
+        <p:spPr>
+          <a:xfrm>
+            <a:off x="8462213" y="91440"/>
+            <a:ext cx="27432" cy="274320"/>
+          </a:xfrm>
+          <a:prstGeom prst="rect">
+            <a:avLst/>
+          </a:prstGeom>
+          <a:solidFill>
+            <a:srgbClr val="B45309"/>
+          </a:solidFill>
+          <a:ln w="12700">
+            <a:solidFill>
+              <a:srgbClr val="B45309"/>
+            </a:solidFill>
+            <a:prstDash val="solid"/>
+          </a:ln>
+        </p:spPr>
+      </p:sp>
+      <p:pic>
+        <p:nvPicPr>
+          <p:cNvPr id="24" name="Image 2" descr="preencoded.png">    </p:cNvPr>
+          <p:cNvPicPr>
+            <a:picLocks noChangeAspect="1"/>
+          </p:cNvPicPr>
+          <p:nvPr/>
+        </p:nvPicPr>
+        <p:blipFill>
+          <a:blip r:embed="rId3"/>
+          <a:stretch>
+            <a:fillRect/>
+          </a:stretch>
+        </p:blipFill>
+        <p:spPr>
+          <a:xfrm>
+            <a:off x="8535365" y="128016"/>
+            <a:ext cx="201168" cy="201168"/>
+          </a:xfrm>
+          <a:prstGeom prst="rect">
+            <a:avLst/>
+          </a:prstGeom>
+        </p:spPr>
+      </p:pic>
+      <p:sp>
+        <p:nvSpPr>
+          <p:cNvPr id="25" name="Text 20"/>
+          <p:cNvSpPr txBox="1"/>
+          <p:nvPr/>
+        </p:nvSpPr>
+        <p:spPr>
+          <a:xfrm>
+            <a:off x="8791397" y="91440"/>
+            <a:ext cx="752602" cy="274320"/>
+          </a:xfrm>
+          <a:prstGeom prst="rect">
+            <a:avLst/>
+          </a:prstGeom>
+          <a:noFill/>
+          <a:ln/>
+        </p:spPr>
+        <p:txBody>
+          <a:bodyPr wrap="square" lIns="0" tIns="0" rIns="0" bIns="0" rtlCol="0" anchor="ctr"/>
+          <a:lstStyle/>
+          <a:p>
+            <a:pPr indent="0" marL="0">
+              <a:buNone/>
+            </a:pPr>
+            <a:r>
+              <a:rPr lang="en-US" sz="1100" b="1" dirty="0">
+                <a:solidFill>
+                  <a:srgbClr val="92400E"/>
+                </a:solidFill>
+                <a:latin typeface="Calibri" pitchFamily="34" charset="0"/>
+                <a:ea typeface="Calibri" pitchFamily="34" charset="-122"/>
+                <a:cs typeface="Calibri" pitchFamily="34" charset="-120"/>
+              </a:rPr>
+              <a:t>USE NOW</a:t>
+            </a:r>
+            <a:endParaRPr lang="en-US" sz="1100" dirty="0"/>
+          </a:p>
+        </p:txBody>
+      </p:sp>
+      <p:sp>
+        <p:nvSpPr>
+          <p:cNvPr id="26" name="Shape 21"/>
+          <p:cNvSpPr/>
+          <p:nvPr/>
+        </p:nvSpPr>
+        <p:spPr>
+          <a:xfrm>
+            <a:off x="6518097" y="91440"/>
+            <a:ext cx="1779524" cy="274320"/>
+          </a:xfrm>
+          <a:prstGeom prst="rect">
+            <a:avLst/>
+          </a:prstGeom>
+          <a:solidFill>
+            <a:srgbClr val="E0F2FE"/>
+          </a:solidFill>
+          <a:ln w="12700">
+            <a:solidFill>
+              <a:srgbClr val="0369A1"/>
+            </a:solidFill>
+            <a:prstDash val="solid"/>
+          </a:ln>
+        </p:spPr>
+      </p:sp>
+      <p:sp>
+        <p:nvSpPr>
+          <p:cNvPr id="27" name="Shape 22"/>
+          <p:cNvSpPr/>
+          <p:nvPr/>
+        </p:nvSpPr>
+        <p:spPr>
+          <a:xfrm>
+            <a:off x="6518097" y="91440"/>
+            <a:ext cx="73152" cy="274320"/>
+          </a:xfrm>
+          <a:prstGeom prst="rect">
+            <a:avLst/>
+          </a:prstGeom>
+          <a:solidFill>
+            <a:srgbClr val="0369A1"/>
+          </a:solidFill>
+          <a:ln w="12700">
+            <a:solidFill>
+              <a:srgbClr val="0369A1"/>
+            </a:solidFill>
+            <a:prstDash val="solid"/>
+          </a:ln>
+        </p:spPr>
+      </p:sp>
+      <p:pic>
+        <p:nvPicPr>
+          <p:cNvPr id="28" name="Image 3" descr="preencoded.png">    </p:cNvPr>
+          <p:cNvPicPr>
+            <a:picLocks noChangeAspect="1"/>
+          </p:cNvPicPr>
+          <p:nvPr/>
+        </p:nvPicPr>
+        <p:blipFill>
+          <a:blip r:embed="rId4"/>
+          <a:stretch>
+            <a:fillRect/>
+          </a:stretch>
+        </p:blipFill>
+        <p:spPr>
+          <a:xfrm>
+            <a:off x="6646113" y="128016"/>
+            <a:ext cx="201168" cy="201168"/>
+          </a:xfrm>
+          <a:prstGeom prst="rect">
+            <a:avLst/>
+          </a:prstGeom>
+        </p:spPr>
+      </p:pic>
+      <p:sp>
+        <p:nvSpPr>
+          <p:cNvPr id="29" name="Text 23"/>
+          <p:cNvSpPr txBox="1"/>
+          <p:nvPr/>
+        </p:nvSpPr>
+        <p:spPr>
+          <a:xfrm>
+            <a:off x="6902145" y="91440"/>
+            <a:ext cx="1358900" cy="274320"/>
+          </a:xfrm>
+          <a:prstGeom prst="rect">
+            <a:avLst/>
+          </a:prstGeom>
+          <a:noFill/>
+          <a:ln/>
+        </p:spPr>
+        <p:txBody>
+          <a:bodyPr wrap="square" lIns="0" tIns="0" rIns="0" bIns="0" rtlCol="0" anchor="ctr"/>
+          <a:lstStyle/>
+          <a:p>
+            <a:pPr indent="0" marL="0">
+              <a:buNone/>
+            </a:pPr>
+            <a:r>
+              <a:rPr lang="en-US" sz="1100" b="1" dirty="0">
+                <a:solidFill>
+                  <a:srgbClr val="075985"/>
+                </a:solidFill>
+                <a:latin typeface="Calibri" pitchFamily="34" charset="0"/>
+                <a:ea typeface="Calibri" pitchFamily="34" charset="-122"/>
+                <a:cs typeface="Calibri" pitchFamily="34" charset="-120"/>
+              </a:rPr>
+              <a:t>UNDERSTAND NOW</a:t>
+            </a:r>
+            <a:endParaRPr lang="en-US" sz="1100" dirty="0"/>
+          </a:p>
+        </p:txBody>
+      </p:sp>
+      <p:sp>
+        <p:nvSpPr>
           <p:cNvPr id="25" name="Slide Number Placeholder 0"/>
           <p:cNvSpPr>
             <a:spLocks noGrp="1"/>
@@ -4383,6 +4814,133 @@
       </p:sp>
       <p:sp>
         <p:nvSpPr>
+          <p:cNvPr id="28" name="Shape 26"/>
+          <p:cNvSpPr/>
+          <p:nvPr/>
+        </p:nvSpPr>
+        <p:spPr>
+          <a:xfrm>
+            <a:off x="8353374" y="91440"/>
+            <a:ext cx="3289681" cy="274320"/>
+          </a:xfrm>
+          <a:prstGeom prst="rect">
+            <a:avLst/>
+          </a:prstGeom>
+          <a:solidFill>
+            <a:srgbClr val="E0F2FE"/>
+          </a:solidFill>
+          <a:ln w="12700">
+            <a:solidFill>
+              <a:srgbClr val="0369A1"/>
+            </a:solidFill>
+            <a:prstDash val="solid"/>
+          </a:ln>
+        </p:spPr>
+      </p:sp>
+      <p:sp>
+        <p:nvSpPr>
+          <p:cNvPr id="29" name="Shape 27"/>
+          <p:cNvSpPr/>
+          <p:nvPr/>
+        </p:nvSpPr>
+        <p:spPr>
+          <a:xfrm>
+            <a:off x="8353374" y="91440"/>
+            <a:ext cx="73152" cy="274320"/>
+          </a:xfrm>
+          <a:prstGeom prst="rect">
+            <a:avLst/>
+          </a:prstGeom>
+          <a:solidFill>
+            <a:srgbClr val="0369A1"/>
+          </a:solidFill>
+          <a:ln w="12700">
+            <a:solidFill>
+              <a:srgbClr val="0369A1"/>
+            </a:solidFill>
+            <a:prstDash val="solid"/>
+          </a:ln>
+        </p:spPr>
+      </p:sp>
+      <p:pic>
+        <p:nvPicPr>
+          <p:cNvPr id="30" name="Image 0" descr="preencoded.png">    </p:cNvPr>
+          <p:cNvPicPr>
+            <a:picLocks noChangeAspect="1"/>
+          </p:cNvPicPr>
+          <p:nvPr/>
+        </p:nvPicPr>
+        <p:blipFill>
+          <a:blip r:embed="rId1"/>
+          <a:stretch>
+            <a:fillRect/>
+          </a:stretch>
+        </p:blipFill>
+        <p:spPr>
+          <a:xfrm>
+            <a:off x="8481390" y="128016"/>
+            <a:ext cx="201168" cy="201168"/>
+          </a:xfrm>
+          <a:prstGeom prst="rect">
+            <a:avLst/>
+          </a:prstGeom>
+        </p:spPr>
+      </p:pic>
+      <p:sp>
+        <p:nvSpPr>
+          <p:cNvPr id="31" name="Text 28"/>
+          <p:cNvSpPr txBox="1"/>
+          <p:nvPr/>
+        </p:nvSpPr>
+        <p:spPr>
+          <a:xfrm>
+            <a:off x="8737422" y="91440"/>
+            <a:ext cx="2869057" cy="274320"/>
+          </a:xfrm>
+          <a:prstGeom prst="rect">
+            <a:avLst/>
+          </a:prstGeom>
+          <a:noFill/>
+          <a:ln/>
+        </p:spPr>
+        <p:txBody>
+          <a:bodyPr wrap="square" lIns="0" tIns="0" rIns="0" bIns="0" rtlCol="0" anchor="ctr"/>
+          <a:lstStyle/>
+          <a:p>
+            <a:pPr indent="0" marL="0">
+              <a:buNone/>
+            </a:pPr>
+            <a:r>
+              <a:rPr lang="en-US" sz="1100" b="1" dirty="0">
+                <a:solidFill>
+                  <a:srgbClr val="075985"/>
+                </a:solidFill>
+                <a:latin typeface="Calibri" pitchFamily="34" charset="0"/>
+                <a:ea typeface="Calibri" pitchFamily="34" charset="-122"/>
+                <a:cs typeface="Calibri" pitchFamily="34" charset="-120"/>
+              </a:rPr>
+              <a:t>UNDERSTAND NOW</a:t>
+            </a:r>
+            <a:pPr indent="0" marL="0">
+              <a:buNone/>
+            </a:pPr>
+            <a:r>
+              <a:rPr lang="en-US" sz="1100" dirty="0">
+                <a:solidFill>
+                  <a:srgbClr val="075985"/>
+                </a:solidFill>
+                <a:latin typeface="Calibri" pitchFamily="34" charset="0"/>
+                <a:ea typeface="Calibri" pitchFamily="34" charset="-122"/>
+                <a:cs typeface="Calibri" pitchFamily="34" charset="-120"/>
+              </a:rPr>
+              <a:t> · interrupts and traps</a:t>
+            </a:r>
+            <a:endParaRPr lang="en-US" sz="1100" dirty="0"/>
+          </a:p>
+        </p:txBody>
+      </p:sp>
+      <p:sp>
+        <p:nvSpPr>
           <p:cNvPr id="25" name="Slide Number Placeholder 0"/>
           <p:cNvSpPr>
             <a:spLocks noGrp="1"/>
@@ -5409,6 +5967,133 @@
       </p:sp>
       <p:sp>
         <p:nvSpPr>
+          <p:cNvPr id="27" name="Shape 25"/>
+          <p:cNvSpPr/>
+          <p:nvPr/>
+        </p:nvSpPr>
+        <p:spPr>
+          <a:xfrm>
+            <a:off x="8353374" y="91440"/>
+            <a:ext cx="3289681" cy="274320"/>
+          </a:xfrm>
+          <a:prstGeom prst="rect">
+            <a:avLst/>
+          </a:prstGeom>
+          <a:solidFill>
+            <a:srgbClr val="E0F2FE"/>
+          </a:solidFill>
+          <a:ln w="12700">
+            <a:solidFill>
+              <a:srgbClr val="0369A1"/>
+            </a:solidFill>
+            <a:prstDash val="solid"/>
+          </a:ln>
+        </p:spPr>
+      </p:sp>
+      <p:sp>
+        <p:nvSpPr>
+          <p:cNvPr id="28" name="Shape 26"/>
+          <p:cNvSpPr/>
+          <p:nvPr/>
+        </p:nvSpPr>
+        <p:spPr>
+          <a:xfrm>
+            <a:off x="8353374" y="91440"/>
+            <a:ext cx="73152" cy="274320"/>
+          </a:xfrm>
+          <a:prstGeom prst="rect">
+            <a:avLst/>
+          </a:prstGeom>
+          <a:solidFill>
+            <a:srgbClr val="0369A1"/>
+          </a:solidFill>
+          <a:ln w="12700">
+            <a:solidFill>
+              <a:srgbClr val="0369A1"/>
+            </a:solidFill>
+            <a:prstDash val="solid"/>
+          </a:ln>
+        </p:spPr>
+      </p:sp>
+      <p:pic>
+        <p:nvPicPr>
+          <p:cNvPr id="29" name="Image 0" descr="preencoded.png">    </p:cNvPr>
+          <p:cNvPicPr>
+            <a:picLocks noChangeAspect="1"/>
+          </p:cNvPicPr>
+          <p:nvPr/>
+        </p:nvPicPr>
+        <p:blipFill>
+          <a:blip r:embed="rId1"/>
+          <a:stretch>
+            <a:fillRect/>
+          </a:stretch>
+        </p:blipFill>
+        <p:spPr>
+          <a:xfrm>
+            <a:off x="8481390" y="128016"/>
+            <a:ext cx="201168" cy="201168"/>
+          </a:xfrm>
+          <a:prstGeom prst="rect">
+            <a:avLst/>
+          </a:prstGeom>
+        </p:spPr>
+      </p:pic>
+      <p:sp>
+        <p:nvSpPr>
+          <p:cNvPr id="30" name="Text 27"/>
+          <p:cNvSpPr txBox="1"/>
+          <p:nvPr/>
+        </p:nvSpPr>
+        <p:spPr>
+          <a:xfrm>
+            <a:off x="8737422" y="91440"/>
+            <a:ext cx="2869057" cy="274320"/>
+          </a:xfrm>
+          <a:prstGeom prst="rect">
+            <a:avLst/>
+          </a:prstGeom>
+          <a:noFill/>
+          <a:ln/>
+        </p:spPr>
+        <p:txBody>
+          <a:bodyPr wrap="square" lIns="0" tIns="0" rIns="0" bIns="0" rtlCol="0" anchor="ctr"/>
+          <a:lstStyle/>
+          <a:p>
+            <a:pPr indent="0" marL="0">
+              <a:buNone/>
+            </a:pPr>
+            <a:r>
+              <a:rPr lang="en-US" sz="1100" b="1" dirty="0">
+                <a:solidFill>
+                  <a:srgbClr val="075985"/>
+                </a:solidFill>
+                <a:latin typeface="Calibri" pitchFamily="34" charset="0"/>
+                <a:ea typeface="Calibri" pitchFamily="34" charset="-122"/>
+                <a:cs typeface="Calibri" pitchFamily="34" charset="-120"/>
+              </a:rPr>
+              <a:t>UNDERSTAND NOW</a:t>
+            </a:r>
+            <a:pPr indent="0" marL="0">
+              <a:buNone/>
+            </a:pPr>
+            <a:r>
+              <a:rPr lang="en-US" sz="1100" dirty="0">
+                <a:solidFill>
+                  <a:srgbClr val="075985"/>
+                </a:solidFill>
+                <a:latin typeface="Calibri" pitchFamily="34" charset="0"/>
+                <a:ea typeface="Calibri" pitchFamily="34" charset="-122"/>
+                <a:cs typeface="Calibri" pitchFamily="34" charset="-120"/>
+              </a:rPr>
+              <a:t> · interrupts and traps</a:t>
+            </a:r>
+            <a:endParaRPr lang="en-US" sz="1100" dirty="0"/>
+          </a:p>
+        </p:txBody>
+      </p:sp>
+      <p:sp>
+        <p:nvSpPr>
           <p:cNvPr id="25" name="Slide Number Placeholder 0"/>
           <p:cNvSpPr>
             <a:spLocks noGrp="1"/>
@@ -6052,6 +6737,133 @@
               <a:t>If the interrupt allows it: restore the context, and resume the suspended program from the instruction that follows the last one executed</a:t>
             </a:r>
             <a:endParaRPr lang="en-US" sz="2200" dirty="0"/>
+          </a:p>
+        </p:txBody>
+      </p:sp>
+      <p:sp>
+        <p:nvSpPr>
+          <p:cNvPr id="15" name="Shape 13"/>
+          <p:cNvSpPr/>
+          <p:nvPr/>
+        </p:nvSpPr>
+        <p:spPr>
+          <a:xfrm>
+            <a:off x="8353374" y="91440"/>
+            <a:ext cx="3289681" cy="274320"/>
+          </a:xfrm>
+          <a:prstGeom prst="rect">
+            <a:avLst/>
+          </a:prstGeom>
+          <a:solidFill>
+            <a:srgbClr val="E0F2FE"/>
+          </a:solidFill>
+          <a:ln w="12700">
+            <a:solidFill>
+              <a:srgbClr val="0369A1"/>
+            </a:solidFill>
+            <a:prstDash val="solid"/>
+          </a:ln>
+        </p:spPr>
+      </p:sp>
+      <p:sp>
+        <p:nvSpPr>
+          <p:cNvPr id="16" name="Shape 14"/>
+          <p:cNvSpPr/>
+          <p:nvPr/>
+        </p:nvSpPr>
+        <p:spPr>
+          <a:xfrm>
+            <a:off x="8353374" y="91440"/>
+            <a:ext cx="73152" cy="274320"/>
+          </a:xfrm>
+          <a:prstGeom prst="rect">
+            <a:avLst/>
+          </a:prstGeom>
+          <a:solidFill>
+            <a:srgbClr val="0369A1"/>
+          </a:solidFill>
+          <a:ln w="12700">
+            <a:solidFill>
+              <a:srgbClr val="0369A1"/>
+            </a:solidFill>
+            <a:prstDash val="solid"/>
+          </a:ln>
+        </p:spPr>
+      </p:sp>
+      <p:pic>
+        <p:nvPicPr>
+          <p:cNvPr id="17" name="Image 0" descr="preencoded.png">    </p:cNvPr>
+          <p:cNvPicPr>
+            <a:picLocks noChangeAspect="1"/>
+          </p:cNvPicPr>
+          <p:nvPr/>
+        </p:nvPicPr>
+        <p:blipFill>
+          <a:blip r:embed="rId1"/>
+          <a:stretch>
+            <a:fillRect/>
+          </a:stretch>
+        </p:blipFill>
+        <p:spPr>
+          <a:xfrm>
+            <a:off x="8481390" y="128016"/>
+            <a:ext cx="201168" cy="201168"/>
+          </a:xfrm>
+          <a:prstGeom prst="rect">
+            <a:avLst/>
+          </a:prstGeom>
+        </p:spPr>
+      </p:pic>
+      <p:sp>
+        <p:nvSpPr>
+          <p:cNvPr id="18" name="Text 15"/>
+          <p:cNvSpPr txBox="1"/>
+          <p:nvPr/>
+        </p:nvSpPr>
+        <p:spPr>
+          <a:xfrm>
+            <a:off x="8737422" y="91440"/>
+            <a:ext cx="2869057" cy="274320"/>
+          </a:xfrm>
+          <a:prstGeom prst="rect">
+            <a:avLst/>
+          </a:prstGeom>
+          <a:noFill/>
+          <a:ln/>
+        </p:spPr>
+        <p:txBody>
+          <a:bodyPr wrap="square" lIns="0" tIns="0" rIns="0" bIns="0" rtlCol="0" anchor="ctr"/>
+          <a:lstStyle/>
+          <a:p>
+            <a:pPr indent="0" marL="0">
+              <a:buNone/>
+            </a:pPr>
+            <a:r>
+              <a:rPr lang="en-US" sz="1100" b="1" dirty="0">
+                <a:solidFill>
+                  <a:srgbClr val="075985"/>
+                </a:solidFill>
+                <a:latin typeface="Calibri" pitchFamily="34" charset="0"/>
+                <a:ea typeface="Calibri" pitchFamily="34" charset="-122"/>
+                <a:cs typeface="Calibri" pitchFamily="34" charset="-120"/>
+              </a:rPr>
+              <a:t>UNDERSTAND NOW</a:t>
+            </a:r>
+            <a:pPr indent="0" marL="0">
+              <a:buNone/>
+            </a:pPr>
+            <a:r>
+              <a:rPr lang="en-US" sz="1100" dirty="0">
+                <a:solidFill>
+                  <a:srgbClr val="075985"/>
+                </a:solidFill>
+                <a:latin typeface="Calibri" pitchFamily="34" charset="0"/>
+                <a:ea typeface="Calibri" pitchFamily="34" charset="-122"/>
+                <a:cs typeface="Calibri" pitchFamily="34" charset="-120"/>
+              </a:rPr>
+              <a:t> · interrupts and traps</a:t>
+            </a:r>
+            <a:endParaRPr lang="en-US" sz="1100" dirty="0"/>
           </a:p>
         </p:txBody>
       </p:sp>
@@ -7644,6 +8456,133 @@
       </p:graphicFrame>
       <p:sp>
         <p:nvSpPr>
+          <p:cNvPr id="4" name="Shape 1"/>
+          <p:cNvSpPr/>
+          <p:nvPr/>
+        </p:nvSpPr>
+        <p:spPr>
+          <a:xfrm>
+            <a:off x="8353374" y="91440"/>
+            <a:ext cx="3289681" cy="274320"/>
+          </a:xfrm>
+          <a:prstGeom prst="rect">
+            <a:avLst/>
+          </a:prstGeom>
+          <a:solidFill>
+            <a:srgbClr val="E0F2FE"/>
+          </a:solidFill>
+          <a:ln w="12700">
+            <a:solidFill>
+              <a:srgbClr val="0369A1"/>
+            </a:solidFill>
+            <a:prstDash val="solid"/>
+          </a:ln>
+        </p:spPr>
+      </p:sp>
+      <p:sp>
+        <p:nvSpPr>
+          <p:cNvPr id="5" name="Shape 2"/>
+          <p:cNvSpPr/>
+          <p:nvPr/>
+        </p:nvSpPr>
+        <p:spPr>
+          <a:xfrm>
+            <a:off x="8353374" y="91440"/>
+            <a:ext cx="73152" cy="274320"/>
+          </a:xfrm>
+          <a:prstGeom prst="rect">
+            <a:avLst/>
+          </a:prstGeom>
+          <a:solidFill>
+            <a:srgbClr val="0369A1"/>
+          </a:solidFill>
+          <a:ln w="12700">
+            <a:solidFill>
+              <a:srgbClr val="0369A1"/>
+            </a:solidFill>
+            <a:prstDash val="solid"/>
+          </a:ln>
+        </p:spPr>
+      </p:sp>
+      <p:pic>
+        <p:nvPicPr>
+          <p:cNvPr id="6" name="Image 0" descr="preencoded.png">    </p:cNvPr>
+          <p:cNvPicPr>
+            <a:picLocks noChangeAspect="1"/>
+          </p:cNvPicPr>
+          <p:nvPr/>
+        </p:nvPicPr>
+        <p:blipFill>
+          <a:blip r:embed="rId1"/>
+          <a:stretch>
+            <a:fillRect/>
+          </a:stretch>
+        </p:blipFill>
+        <p:spPr>
+          <a:xfrm>
+            <a:off x="8481390" y="128016"/>
+            <a:ext cx="201168" cy="201168"/>
+          </a:xfrm>
+          <a:prstGeom prst="rect">
+            <a:avLst/>
+          </a:prstGeom>
+        </p:spPr>
+      </p:pic>
+      <p:sp>
+        <p:nvSpPr>
+          <p:cNvPr id="7" name="Text 3"/>
+          <p:cNvSpPr txBox="1"/>
+          <p:nvPr/>
+        </p:nvSpPr>
+        <p:spPr>
+          <a:xfrm>
+            <a:off x="8737422" y="91440"/>
+            <a:ext cx="2869057" cy="274320"/>
+          </a:xfrm>
+          <a:prstGeom prst="rect">
+            <a:avLst/>
+          </a:prstGeom>
+          <a:noFill/>
+          <a:ln/>
+        </p:spPr>
+        <p:txBody>
+          <a:bodyPr wrap="square" lIns="0" tIns="0" rIns="0" bIns="0" rtlCol="0" anchor="ctr"/>
+          <a:lstStyle/>
+          <a:p>
+            <a:pPr indent="0" marL="0">
+              <a:buNone/>
+            </a:pPr>
+            <a:r>
+              <a:rPr lang="en-US" sz="1100" b="1" dirty="0">
+                <a:solidFill>
+                  <a:srgbClr val="075985"/>
+                </a:solidFill>
+                <a:latin typeface="Calibri" pitchFamily="34" charset="0"/>
+                <a:ea typeface="Calibri" pitchFamily="34" charset="-122"/>
+                <a:cs typeface="Calibri" pitchFamily="34" charset="-120"/>
+              </a:rPr>
+              <a:t>UNDERSTAND NOW</a:t>
+            </a:r>
+            <a:pPr indent="0" marL="0">
+              <a:buNone/>
+            </a:pPr>
+            <a:r>
+              <a:rPr lang="en-US" sz="1100" dirty="0">
+                <a:solidFill>
+                  <a:srgbClr val="075985"/>
+                </a:solidFill>
+                <a:latin typeface="Calibri" pitchFamily="34" charset="0"/>
+                <a:ea typeface="Calibri" pitchFamily="34" charset="-122"/>
+                <a:cs typeface="Calibri" pitchFamily="34" charset="-120"/>
+              </a:rPr>
+              <a:t> · interrupts and traps</a:t>
+            </a:r>
+            <a:endParaRPr lang="en-US" sz="1100" dirty="0"/>
+          </a:p>
+        </p:txBody>
+      </p:sp>
+      <p:sp>
+        <p:nvSpPr>
           <p:cNvPr id="25" name="Slide Number Placeholder 0"/>
           <p:cNvSpPr>
             <a:spLocks noGrp="1"/>
@@ -8287,6 +9226,133 @@
               <a:t>mret, at the end of the handler, undoes it: MIE := MPIE and PC := mepc</a:t>
             </a:r>
             <a:endParaRPr lang="en-US" sz="2200" dirty="0"/>
+          </a:p>
+        </p:txBody>
+      </p:sp>
+      <p:sp>
+        <p:nvSpPr>
+          <p:cNvPr id="15" name="Shape 13"/>
+          <p:cNvSpPr/>
+          <p:nvPr/>
+        </p:nvSpPr>
+        <p:spPr>
+          <a:xfrm>
+            <a:off x="8353374" y="91440"/>
+            <a:ext cx="3289681" cy="274320"/>
+          </a:xfrm>
+          <a:prstGeom prst="rect">
+            <a:avLst/>
+          </a:prstGeom>
+          <a:solidFill>
+            <a:srgbClr val="E0F2FE"/>
+          </a:solidFill>
+          <a:ln w="12700">
+            <a:solidFill>
+              <a:srgbClr val="0369A1"/>
+            </a:solidFill>
+            <a:prstDash val="solid"/>
+          </a:ln>
+        </p:spPr>
+      </p:sp>
+      <p:sp>
+        <p:nvSpPr>
+          <p:cNvPr id="16" name="Shape 14"/>
+          <p:cNvSpPr/>
+          <p:nvPr/>
+        </p:nvSpPr>
+        <p:spPr>
+          <a:xfrm>
+            <a:off x="8353374" y="91440"/>
+            <a:ext cx="73152" cy="274320"/>
+          </a:xfrm>
+          <a:prstGeom prst="rect">
+            <a:avLst/>
+          </a:prstGeom>
+          <a:solidFill>
+            <a:srgbClr val="0369A1"/>
+          </a:solidFill>
+          <a:ln w="12700">
+            <a:solidFill>
+              <a:srgbClr val="0369A1"/>
+            </a:solidFill>
+            <a:prstDash val="solid"/>
+          </a:ln>
+        </p:spPr>
+      </p:sp>
+      <p:pic>
+        <p:nvPicPr>
+          <p:cNvPr id="17" name="Image 0" descr="preencoded.png">    </p:cNvPr>
+          <p:cNvPicPr>
+            <a:picLocks noChangeAspect="1"/>
+          </p:cNvPicPr>
+          <p:nvPr/>
+        </p:nvPicPr>
+        <p:blipFill>
+          <a:blip r:embed="rId1"/>
+          <a:stretch>
+            <a:fillRect/>
+          </a:stretch>
+        </p:blipFill>
+        <p:spPr>
+          <a:xfrm>
+            <a:off x="8481390" y="128016"/>
+            <a:ext cx="201168" cy="201168"/>
+          </a:xfrm>
+          <a:prstGeom prst="rect">
+            <a:avLst/>
+          </a:prstGeom>
+        </p:spPr>
+      </p:pic>
+      <p:sp>
+        <p:nvSpPr>
+          <p:cNvPr id="18" name="Text 15"/>
+          <p:cNvSpPr txBox="1"/>
+          <p:nvPr/>
+        </p:nvSpPr>
+        <p:spPr>
+          <a:xfrm>
+            <a:off x="8737422" y="91440"/>
+            <a:ext cx="2869057" cy="274320"/>
+          </a:xfrm>
+          <a:prstGeom prst="rect">
+            <a:avLst/>
+          </a:prstGeom>
+          <a:noFill/>
+          <a:ln/>
+        </p:spPr>
+        <p:txBody>
+          <a:bodyPr wrap="square" lIns="0" tIns="0" rIns="0" bIns="0" rtlCol="0" anchor="ctr"/>
+          <a:lstStyle/>
+          <a:p>
+            <a:pPr indent="0" marL="0">
+              <a:buNone/>
+            </a:pPr>
+            <a:r>
+              <a:rPr lang="en-US" sz="1100" b="1" dirty="0">
+                <a:solidFill>
+                  <a:srgbClr val="075985"/>
+                </a:solidFill>
+                <a:latin typeface="Calibri" pitchFamily="34" charset="0"/>
+                <a:ea typeface="Calibri" pitchFamily="34" charset="-122"/>
+                <a:cs typeface="Calibri" pitchFamily="34" charset="-120"/>
+              </a:rPr>
+              <a:t>UNDERSTAND NOW</a:t>
+            </a:r>
+            <a:pPr indent="0" marL="0">
+              <a:buNone/>
+            </a:pPr>
+            <a:r>
+              <a:rPr lang="en-US" sz="1100" dirty="0">
+                <a:solidFill>
+                  <a:srgbClr val="075985"/>
+                </a:solidFill>
+                <a:latin typeface="Calibri" pitchFamily="34" charset="0"/>
+                <a:ea typeface="Calibri" pitchFamily="34" charset="-122"/>
+                <a:cs typeface="Calibri" pitchFamily="34" charset="-120"/>
+              </a:rPr>
+              <a:t> · interrupts and traps</a:t>
+            </a:r>
+            <a:endParaRPr lang="en-US" sz="1100" dirty="0"/>
           </a:p>
         </p:txBody>
       </p:sp>
@@ -10085,6 +11151,133 @@
       </p:graphicFrame>
       <p:sp>
         <p:nvSpPr>
+          <p:cNvPr id="4" name="Shape 1"/>
+          <p:cNvSpPr/>
+          <p:nvPr/>
+        </p:nvSpPr>
+        <p:spPr>
+          <a:xfrm>
+            <a:off x="8353374" y="91440"/>
+            <a:ext cx="3289681" cy="274320"/>
+          </a:xfrm>
+          <a:prstGeom prst="rect">
+            <a:avLst/>
+          </a:prstGeom>
+          <a:solidFill>
+            <a:srgbClr val="E0F2FE"/>
+          </a:solidFill>
+          <a:ln w="12700">
+            <a:solidFill>
+              <a:srgbClr val="0369A1"/>
+            </a:solidFill>
+            <a:prstDash val="solid"/>
+          </a:ln>
+        </p:spPr>
+      </p:sp>
+      <p:sp>
+        <p:nvSpPr>
+          <p:cNvPr id="5" name="Shape 2"/>
+          <p:cNvSpPr/>
+          <p:nvPr/>
+        </p:nvSpPr>
+        <p:spPr>
+          <a:xfrm>
+            <a:off x="8353374" y="91440"/>
+            <a:ext cx="73152" cy="274320"/>
+          </a:xfrm>
+          <a:prstGeom prst="rect">
+            <a:avLst/>
+          </a:prstGeom>
+          <a:solidFill>
+            <a:srgbClr val="0369A1"/>
+          </a:solidFill>
+          <a:ln w="12700">
+            <a:solidFill>
+              <a:srgbClr val="0369A1"/>
+            </a:solidFill>
+            <a:prstDash val="solid"/>
+          </a:ln>
+        </p:spPr>
+      </p:sp>
+      <p:pic>
+        <p:nvPicPr>
+          <p:cNvPr id="6" name="Image 0" descr="preencoded.png">    </p:cNvPr>
+          <p:cNvPicPr>
+            <a:picLocks noChangeAspect="1"/>
+          </p:cNvPicPr>
+          <p:nvPr/>
+        </p:nvPicPr>
+        <p:blipFill>
+          <a:blip r:embed="rId1"/>
+          <a:stretch>
+            <a:fillRect/>
+          </a:stretch>
+        </p:blipFill>
+        <p:spPr>
+          <a:xfrm>
+            <a:off x="8481390" y="128016"/>
+            <a:ext cx="201168" cy="201168"/>
+          </a:xfrm>
+          <a:prstGeom prst="rect">
+            <a:avLst/>
+          </a:prstGeom>
+        </p:spPr>
+      </p:pic>
+      <p:sp>
+        <p:nvSpPr>
+          <p:cNvPr id="7" name="Text 3"/>
+          <p:cNvSpPr txBox="1"/>
+          <p:nvPr/>
+        </p:nvSpPr>
+        <p:spPr>
+          <a:xfrm>
+            <a:off x="8737422" y="91440"/>
+            <a:ext cx="2869057" cy="274320"/>
+          </a:xfrm>
+          <a:prstGeom prst="rect">
+            <a:avLst/>
+          </a:prstGeom>
+          <a:noFill/>
+          <a:ln/>
+        </p:spPr>
+        <p:txBody>
+          <a:bodyPr wrap="square" lIns="0" tIns="0" rIns="0" bIns="0" rtlCol="0" anchor="ctr"/>
+          <a:lstStyle/>
+          <a:p>
+            <a:pPr indent="0" marL="0">
+              <a:buNone/>
+            </a:pPr>
+            <a:r>
+              <a:rPr lang="en-US" sz="1100" b="1" dirty="0">
+                <a:solidFill>
+                  <a:srgbClr val="075985"/>
+                </a:solidFill>
+                <a:latin typeface="Calibri" pitchFamily="34" charset="0"/>
+                <a:ea typeface="Calibri" pitchFamily="34" charset="-122"/>
+                <a:cs typeface="Calibri" pitchFamily="34" charset="-120"/>
+              </a:rPr>
+              <a:t>UNDERSTAND NOW</a:t>
+            </a:r>
+            <a:pPr indent="0" marL="0">
+              <a:buNone/>
+            </a:pPr>
+            <a:r>
+              <a:rPr lang="en-US" sz="1100" dirty="0">
+                <a:solidFill>
+                  <a:srgbClr val="075985"/>
+                </a:solidFill>
+                <a:latin typeface="Calibri" pitchFamily="34" charset="0"/>
+                <a:ea typeface="Calibri" pitchFamily="34" charset="-122"/>
+                <a:cs typeface="Calibri" pitchFamily="34" charset="-120"/>
+              </a:rPr>
+              <a:t> · interrupts and traps</a:t>
+            </a:r>
+            <a:endParaRPr lang="en-US" sz="1100" dirty="0"/>
+          </a:p>
+        </p:txBody>
+      </p:sp>
+      <p:sp>
+        <p:nvSpPr>
           <p:cNvPr id="25" name="Slide Number Placeholder 0"/>
           <p:cNvSpPr>
             <a:spLocks noGrp="1"/>
@@ -10592,6 +11785,133 @@
               <a:t>The PRG32 firmware menu</a:t>
             </a:r>
             <a:endParaRPr lang="en-US" sz="1200" dirty="0"/>
+          </a:p>
+        </p:txBody>
+      </p:sp>
+      <p:sp>
+        <p:nvSpPr>
+          <p:cNvPr id="15" name="Shape 12"/>
+          <p:cNvSpPr/>
+          <p:nvPr/>
+        </p:nvSpPr>
+        <p:spPr>
+          <a:xfrm>
+            <a:off x="8353374" y="91440"/>
+            <a:ext cx="3289681" cy="274320"/>
+          </a:xfrm>
+          <a:prstGeom prst="rect">
+            <a:avLst/>
+          </a:prstGeom>
+          <a:solidFill>
+            <a:srgbClr val="E0F2FE"/>
+          </a:solidFill>
+          <a:ln w="12700">
+            <a:solidFill>
+              <a:srgbClr val="0369A1"/>
+            </a:solidFill>
+            <a:prstDash val="solid"/>
+          </a:ln>
+        </p:spPr>
+      </p:sp>
+      <p:sp>
+        <p:nvSpPr>
+          <p:cNvPr id="16" name="Shape 13"/>
+          <p:cNvSpPr/>
+          <p:nvPr/>
+        </p:nvSpPr>
+        <p:spPr>
+          <a:xfrm>
+            <a:off x="8353374" y="91440"/>
+            <a:ext cx="73152" cy="274320"/>
+          </a:xfrm>
+          <a:prstGeom prst="rect">
+            <a:avLst/>
+          </a:prstGeom>
+          <a:solidFill>
+            <a:srgbClr val="0369A1"/>
+          </a:solidFill>
+          <a:ln w="12700">
+            <a:solidFill>
+              <a:srgbClr val="0369A1"/>
+            </a:solidFill>
+            <a:prstDash val="solid"/>
+          </a:ln>
+        </p:spPr>
+      </p:sp>
+      <p:pic>
+        <p:nvPicPr>
+          <p:cNvPr id="17" name="Image 1" descr="preencoded.png">    </p:cNvPr>
+          <p:cNvPicPr>
+            <a:picLocks noChangeAspect="1"/>
+          </p:cNvPicPr>
+          <p:nvPr/>
+        </p:nvPicPr>
+        <p:blipFill>
+          <a:blip r:embed="rId2"/>
+          <a:stretch>
+            <a:fillRect/>
+          </a:stretch>
+        </p:blipFill>
+        <p:spPr>
+          <a:xfrm>
+            <a:off x="8481390" y="128016"/>
+            <a:ext cx="201168" cy="201168"/>
+          </a:xfrm>
+          <a:prstGeom prst="rect">
+            <a:avLst/>
+          </a:prstGeom>
+        </p:spPr>
+      </p:pic>
+      <p:sp>
+        <p:nvSpPr>
+          <p:cNvPr id="18" name="Text 14"/>
+          <p:cNvSpPr txBox="1"/>
+          <p:nvPr/>
+        </p:nvSpPr>
+        <p:spPr>
+          <a:xfrm>
+            <a:off x="8737422" y="91440"/>
+            <a:ext cx="2869057" cy="274320"/>
+          </a:xfrm>
+          <a:prstGeom prst="rect">
+            <a:avLst/>
+          </a:prstGeom>
+          <a:noFill/>
+          <a:ln/>
+        </p:spPr>
+        <p:txBody>
+          <a:bodyPr wrap="square" lIns="0" tIns="0" rIns="0" bIns="0" rtlCol="0" anchor="ctr"/>
+          <a:lstStyle/>
+          <a:p>
+            <a:pPr indent="0" marL="0">
+              <a:buNone/>
+            </a:pPr>
+            <a:r>
+              <a:rPr lang="en-US" sz="1100" b="1" dirty="0">
+                <a:solidFill>
+                  <a:srgbClr val="075985"/>
+                </a:solidFill>
+                <a:latin typeface="Calibri" pitchFamily="34" charset="0"/>
+                <a:ea typeface="Calibri" pitchFamily="34" charset="-122"/>
+                <a:cs typeface="Calibri" pitchFamily="34" charset="-120"/>
+              </a:rPr>
+              <a:t>UNDERSTAND NOW</a:t>
+            </a:r>
+            <a:pPr indent="0" marL="0">
+              <a:buNone/>
+            </a:pPr>
+            <a:r>
+              <a:rPr lang="en-US" sz="1100" dirty="0">
+                <a:solidFill>
+                  <a:srgbClr val="075985"/>
+                </a:solidFill>
+                <a:latin typeface="Calibri" pitchFamily="34" charset="0"/>
+                <a:ea typeface="Calibri" pitchFamily="34" charset="-122"/>
+                <a:cs typeface="Calibri" pitchFamily="34" charset="-120"/>
+              </a:rPr>
+              <a:t> · interrupts and traps</a:t>
+            </a:r>
+            <a:endParaRPr lang="en-US" sz="1100" dirty="0"/>
           </a:p>
         </p:txBody>
       </p:sp>
@@ -16787,6 +18107,133 @@
       </p:sp>
       <p:sp>
         <p:nvSpPr>
+          <p:cNvPr id="11" name="Shape 9"/>
+          <p:cNvSpPr/>
+          <p:nvPr/>
+        </p:nvSpPr>
+        <p:spPr>
+          <a:xfrm>
+            <a:off x="8419033" y="91440"/>
+            <a:ext cx="3224022" cy="274320"/>
+          </a:xfrm>
+          <a:prstGeom prst="rect">
+            <a:avLst/>
+          </a:prstGeom>
+          <a:solidFill>
+            <a:srgbClr val="E0F2FE"/>
+          </a:solidFill>
+          <a:ln w="12700">
+            <a:solidFill>
+              <a:srgbClr val="0369A1"/>
+            </a:solidFill>
+            <a:prstDash val="solid"/>
+          </a:ln>
+        </p:spPr>
+      </p:sp>
+      <p:sp>
+        <p:nvSpPr>
+          <p:cNvPr id="12" name="Shape 10"/>
+          <p:cNvSpPr/>
+          <p:nvPr/>
+        </p:nvSpPr>
+        <p:spPr>
+          <a:xfrm>
+            <a:off x="8419033" y="91440"/>
+            <a:ext cx="73152" cy="274320"/>
+          </a:xfrm>
+          <a:prstGeom prst="rect">
+            <a:avLst/>
+          </a:prstGeom>
+          <a:solidFill>
+            <a:srgbClr val="0369A1"/>
+          </a:solidFill>
+          <a:ln w="12700">
+            <a:solidFill>
+              <a:srgbClr val="0369A1"/>
+            </a:solidFill>
+            <a:prstDash val="solid"/>
+          </a:ln>
+        </p:spPr>
+      </p:sp>
+      <p:pic>
+        <p:nvPicPr>
+          <p:cNvPr id="13" name="Image 0" descr="preencoded.png">    </p:cNvPr>
+          <p:cNvPicPr>
+            <a:picLocks noChangeAspect="1"/>
+          </p:cNvPicPr>
+          <p:nvPr/>
+        </p:nvPicPr>
+        <p:blipFill>
+          <a:blip r:embed="rId1"/>
+          <a:stretch>
+            <a:fillRect/>
+          </a:stretch>
+        </p:blipFill>
+        <p:spPr>
+          <a:xfrm>
+            <a:off x="8547049" y="128016"/>
+            <a:ext cx="201168" cy="201168"/>
+          </a:xfrm>
+          <a:prstGeom prst="rect">
+            <a:avLst/>
+          </a:prstGeom>
+        </p:spPr>
+      </p:pic>
+      <p:sp>
+        <p:nvSpPr>
+          <p:cNvPr id="14" name="Text 11"/>
+          <p:cNvSpPr txBox="1"/>
+          <p:nvPr/>
+        </p:nvSpPr>
+        <p:spPr>
+          <a:xfrm>
+            <a:off x="8803081" y="91440"/>
+            <a:ext cx="2803398" cy="274320"/>
+          </a:xfrm>
+          <a:prstGeom prst="rect">
+            <a:avLst/>
+          </a:prstGeom>
+          <a:noFill/>
+          <a:ln/>
+        </p:spPr>
+        <p:txBody>
+          <a:bodyPr wrap="square" lIns="0" tIns="0" rIns="0" bIns="0" rtlCol="0" anchor="ctr"/>
+          <a:lstStyle/>
+          <a:p>
+            <a:pPr indent="0" marL="0">
+              <a:buNone/>
+            </a:pPr>
+            <a:r>
+              <a:rPr lang="en-US" sz="1100" b="1" dirty="0">
+                <a:solidFill>
+                  <a:srgbClr val="075985"/>
+                </a:solidFill>
+                <a:latin typeface="Calibri" pitchFamily="34" charset="0"/>
+                <a:ea typeface="Calibri" pitchFamily="34" charset="-122"/>
+                <a:cs typeface="Calibri" pitchFamily="34" charset="-120"/>
+              </a:rPr>
+              <a:t>UNDERSTAND NOW</a:t>
+            </a:r>
+            <a:pPr indent="0" marL="0">
+              <a:buNone/>
+            </a:pPr>
+            <a:r>
+              <a:rPr lang="en-US" sz="1100" dirty="0">
+                <a:solidFill>
+                  <a:srgbClr val="075985"/>
+                </a:solidFill>
+                <a:latin typeface="Calibri" pitchFamily="34" charset="0"/>
+                <a:ea typeface="Calibri" pitchFamily="34" charset="-122"/>
+                <a:cs typeface="Calibri" pitchFamily="34" charset="-120"/>
+              </a:rPr>
+              <a:t> · instruction formats</a:t>
+            </a:r>
+            <a:endParaRPr lang="en-US" sz="1100" dirty="0"/>
+          </a:p>
+        </p:txBody>
+      </p:sp>
+      <p:sp>
+        <p:nvSpPr>
           <p:cNvPr id="25" name="Slide Number Placeholder 0"/>
           <p:cNvSpPr>
             <a:spLocks noGrp="1"/>
@@ -18459,6 +19906,133 @@
               <a:t>Six formats, all of 32 bits. The opcode is always in the same seven bits, and the register numbers rd, rs1 and rs2 are always in the same places: the processor can read them before it even knows which instruction it is.</a:t>
             </a:r>
             <a:endParaRPr lang="en-US" sz="1400" dirty="0"/>
+          </a:p>
+        </p:txBody>
+      </p:sp>
+      <p:sp>
+        <p:nvSpPr>
+          <p:cNvPr id="40" name="Shape 38"/>
+          <p:cNvSpPr/>
+          <p:nvPr/>
+        </p:nvSpPr>
+        <p:spPr>
+          <a:xfrm>
+            <a:off x="8419033" y="91440"/>
+            <a:ext cx="3224022" cy="274320"/>
+          </a:xfrm>
+          <a:prstGeom prst="rect">
+            <a:avLst/>
+          </a:prstGeom>
+          <a:solidFill>
+            <a:srgbClr val="E0F2FE"/>
+          </a:solidFill>
+          <a:ln w="12700">
+            <a:solidFill>
+              <a:srgbClr val="0369A1"/>
+            </a:solidFill>
+            <a:prstDash val="solid"/>
+          </a:ln>
+        </p:spPr>
+      </p:sp>
+      <p:sp>
+        <p:nvSpPr>
+          <p:cNvPr id="41" name="Shape 39"/>
+          <p:cNvSpPr/>
+          <p:nvPr/>
+        </p:nvSpPr>
+        <p:spPr>
+          <a:xfrm>
+            <a:off x="8419033" y="91440"/>
+            <a:ext cx="73152" cy="274320"/>
+          </a:xfrm>
+          <a:prstGeom prst="rect">
+            <a:avLst/>
+          </a:prstGeom>
+          <a:solidFill>
+            <a:srgbClr val="0369A1"/>
+          </a:solidFill>
+          <a:ln w="12700">
+            <a:solidFill>
+              <a:srgbClr val="0369A1"/>
+            </a:solidFill>
+            <a:prstDash val="solid"/>
+          </a:ln>
+        </p:spPr>
+      </p:sp>
+      <p:pic>
+        <p:nvPicPr>
+          <p:cNvPr id="42" name="Image 0" descr="preencoded.png">    </p:cNvPr>
+          <p:cNvPicPr>
+            <a:picLocks noChangeAspect="1"/>
+          </p:cNvPicPr>
+          <p:nvPr/>
+        </p:nvPicPr>
+        <p:blipFill>
+          <a:blip r:embed="rId1"/>
+          <a:stretch>
+            <a:fillRect/>
+          </a:stretch>
+        </p:blipFill>
+        <p:spPr>
+          <a:xfrm>
+            <a:off x="8547049" y="128016"/>
+            <a:ext cx="201168" cy="201168"/>
+          </a:xfrm>
+          <a:prstGeom prst="rect">
+            <a:avLst/>
+          </a:prstGeom>
+        </p:spPr>
+      </p:pic>
+      <p:sp>
+        <p:nvSpPr>
+          <p:cNvPr id="43" name="Text 40"/>
+          <p:cNvSpPr txBox="1"/>
+          <p:nvPr/>
+        </p:nvSpPr>
+        <p:spPr>
+          <a:xfrm>
+            <a:off x="8803081" y="91440"/>
+            <a:ext cx="2803398" cy="274320"/>
+          </a:xfrm>
+          <a:prstGeom prst="rect">
+            <a:avLst/>
+          </a:prstGeom>
+          <a:noFill/>
+          <a:ln/>
+        </p:spPr>
+        <p:txBody>
+          <a:bodyPr wrap="square" lIns="0" tIns="0" rIns="0" bIns="0" rtlCol="0" anchor="ctr"/>
+          <a:lstStyle/>
+          <a:p>
+            <a:pPr indent="0" marL="0">
+              <a:buNone/>
+            </a:pPr>
+            <a:r>
+              <a:rPr lang="en-US" sz="1100" b="1" dirty="0">
+                <a:solidFill>
+                  <a:srgbClr val="075985"/>
+                </a:solidFill>
+                <a:latin typeface="Calibri" pitchFamily="34" charset="0"/>
+                <a:ea typeface="Calibri" pitchFamily="34" charset="-122"/>
+                <a:cs typeface="Calibri" pitchFamily="34" charset="-120"/>
+              </a:rPr>
+              <a:t>UNDERSTAND NOW</a:t>
+            </a:r>
+            <a:pPr indent="0" marL="0">
+              <a:buNone/>
+            </a:pPr>
+            <a:r>
+              <a:rPr lang="en-US" sz="1100" dirty="0">
+                <a:solidFill>
+                  <a:srgbClr val="075985"/>
+                </a:solidFill>
+                <a:latin typeface="Calibri" pitchFamily="34" charset="0"/>
+                <a:ea typeface="Calibri" pitchFamily="34" charset="-122"/>
+                <a:cs typeface="Calibri" pitchFamily="34" charset="-120"/>
+              </a:rPr>
+              <a:t> · instruction formats</a:t>
+            </a:r>
+            <a:endParaRPr lang="en-US" sz="1100" dirty="0"/>
           </a:p>
         </p:txBody>
       </p:sp>
@@ -19845,6 +21419,133 @@
       </p:graphicFrame>
       <p:sp>
         <p:nvSpPr>
+          <p:cNvPr id="4" name="Shape 1"/>
+          <p:cNvSpPr/>
+          <p:nvPr/>
+        </p:nvSpPr>
+        <p:spPr>
+          <a:xfrm>
+            <a:off x="8616010" y="91440"/>
+            <a:ext cx="3027045" cy="274320"/>
+          </a:xfrm>
+          <a:prstGeom prst="rect">
+            <a:avLst/>
+          </a:prstGeom>
+          <a:solidFill>
+            <a:srgbClr val="E0F2FE"/>
+          </a:solidFill>
+          <a:ln w="12700">
+            <a:solidFill>
+              <a:srgbClr val="0369A1"/>
+            </a:solidFill>
+            <a:prstDash val="solid"/>
+          </a:ln>
+        </p:spPr>
+      </p:sp>
+      <p:sp>
+        <p:nvSpPr>
+          <p:cNvPr id="5" name="Shape 2"/>
+          <p:cNvSpPr/>
+          <p:nvPr/>
+        </p:nvSpPr>
+        <p:spPr>
+          <a:xfrm>
+            <a:off x="8616010" y="91440"/>
+            <a:ext cx="73152" cy="274320"/>
+          </a:xfrm>
+          <a:prstGeom prst="rect">
+            <a:avLst/>
+          </a:prstGeom>
+          <a:solidFill>
+            <a:srgbClr val="0369A1"/>
+          </a:solidFill>
+          <a:ln w="12700">
+            <a:solidFill>
+              <a:srgbClr val="0369A1"/>
+            </a:solidFill>
+            <a:prstDash val="solid"/>
+          </a:ln>
+        </p:spPr>
+      </p:sp>
+      <p:pic>
+        <p:nvPicPr>
+          <p:cNvPr id="6" name="Image 0" descr="preencoded.png">    </p:cNvPr>
+          <p:cNvPicPr>
+            <a:picLocks noChangeAspect="1"/>
+          </p:cNvPicPr>
+          <p:nvPr/>
+        </p:nvPicPr>
+        <p:blipFill>
+          <a:blip r:embed="rId1"/>
+          <a:stretch>
+            <a:fillRect/>
+          </a:stretch>
+        </p:blipFill>
+        <p:spPr>
+          <a:xfrm>
+            <a:off x="8744026" y="128016"/>
+            <a:ext cx="201168" cy="201168"/>
+          </a:xfrm>
+          <a:prstGeom prst="rect">
+            <a:avLst/>
+          </a:prstGeom>
+        </p:spPr>
+      </p:pic>
+      <p:sp>
+        <p:nvSpPr>
+          <p:cNvPr id="7" name="Text 3"/>
+          <p:cNvSpPr txBox="1"/>
+          <p:nvPr/>
+        </p:nvSpPr>
+        <p:spPr>
+          <a:xfrm>
+            <a:off x="9000058" y="91440"/>
+            <a:ext cx="2606421" cy="274320"/>
+          </a:xfrm>
+          <a:prstGeom prst="rect">
+            <a:avLst/>
+          </a:prstGeom>
+          <a:noFill/>
+          <a:ln/>
+        </p:spPr>
+        <p:txBody>
+          <a:bodyPr wrap="square" lIns="0" tIns="0" rIns="0" bIns="0" rtlCol="0" anchor="ctr"/>
+          <a:lstStyle/>
+          <a:p>
+            <a:pPr indent="0" marL="0">
+              <a:buNone/>
+            </a:pPr>
+            <a:r>
+              <a:rPr lang="en-US" sz="1100" b="1" dirty="0">
+                <a:solidFill>
+                  <a:srgbClr val="075985"/>
+                </a:solidFill>
+                <a:latin typeface="Calibri" pitchFamily="34" charset="0"/>
+                <a:ea typeface="Calibri" pitchFamily="34" charset="-122"/>
+                <a:cs typeface="Calibri" pitchFamily="34" charset="-120"/>
+              </a:rPr>
+              <a:t>UNDERSTAND NOW</a:t>
+            </a:r>
+            <a:pPr indent="0" marL="0">
+              <a:buNone/>
+            </a:pPr>
+            <a:r>
+              <a:rPr lang="en-US" sz="1100" dirty="0">
+                <a:solidFill>
+                  <a:srgbClr val="075985"/>
+                </a:solidFill>
+                <a:latin typeface="Calibri" pitchFamily="34" charset="0"/>
+                <a:ea typeface="Calibri" pitchFamily="34" charset="-122"/>
+                <a:cs typeface="Calibri" pitchFamily="34" charset="-120"/>
+              </a:rPr>
+              <a:t> · addressing modes</a:t>
+            </a:r>
+            <a:endParaRPr lang="en-US" sz="1100" dirty="0"/>
+          </a:p>
+        </p:txBody>
+      </p:sp>
+      <p:sp>
+        <p:nvSpPr>
           <p:cNvPr id="25" name="Slide Number Placeholder 0"/>
           <p:cNvSpPr>
             <a:spLocks noGrp="1"/>
@@ -20685,6 +22386,133 @@
               <a:t>After a start-up phase, the bootstrap, the processor repeats this cycle for ever. In processors with rich addressing modes, a phase of operand assembly collects the operands before the execution.</a:t>
             </a:r>
             <a:endParaRPr lang="en-US" sz="2000" dirty="0"/>
+          </a:p>
+        </p:txBody>
+      </p:sp>
+      <p:sp>
+        <p:nvSpPr>
+          <p:cNvPr id="24" name="Shape 22"/>
+          <p:cNvSpPr/>
+          <p:nvPr/>
+        </p:nvSpPr>
+        <p:spPr>
+          <a:xfrm>
+            <a:off x="8419033" y="91440"/>
+            <a:ext cx="3224022" cy="274320"/>
+          </a:xfrm>
+          <a:prstGeom prst="rect">
+            <a:avLst/>
+          </a:prstGeom>
+          <a:solidFill>
+            <a:srgbClr val="E0F2FE"/>
+          </a:solidFill>
+          <a:ln w="12700">
+            <a:solidFill>
+              <a:srgbClr val="0369A1"/>
+            </a:solidFill>
+            <a:prstDash val="solid"/>
+          </a:ln>
+        </p:spPr>
+      </p:sp>
+      <p:sp>
+        <p:nvSpPr>
+          <p:cNvPr id="25" name="Shape 23"/>
+          <p:cNvSpPr/>
+          <p:nvPr/>
+        </p:nvSpPr>
+        <p:spPr>
+          <a:xfrm>
+            <a:off x="8419033" y="91440"/>
+            <a:ext cx="73152" cy="274320"/>
+          </a:xfrm>
+          <a:prstGeom prst="rect">
+            <a:avLst/>
+          </a:prstGeom>
+          <a:solidFill>
+            <a:srgbClr val="0369A1"/>
+          </a:solidFill>
+          <a:ln w="12700">
+            <a:solidFill>
+              <a:srgbClr val="0369A1"/>
+            </a:solidFill>
+            <a:prstDash val="solid"/>
+          </a:ln>
+        </p:spPr>
+      </p:sp>
+      <p:pic>
+        <p:nvPicPr>
+          <p:cNvPr id="26" name="Image 0" descr="preencoded.png">    </p:cNvPr>
+          <p:cNvPicPr>
+            <a:picLocks noChangeAspect="1"/>
+          </p:cNvPicPr>
+          <p:nvPr/>
+        </p:nvPicPr>
+        <p:blipFill>
+          <a:blip r:embed="rId1"/>
+          <a:stretch>
+            <a:fillRect/>
+          </a:stretch>
+        </p:blipFill>
+        <p:spPr>
+          <a:xfrm>
+            <a:off x="8547049" y="128016"/>
+            <a:ext cx="201168" cy="201168"/>
+          </a:xfrm>
+          <a:prstGeom prst="rect">
+            <a:avLst/>
+          </a:prstGeom>
+        </p:spPr>
+      </p:pic>
+      <p:sp>
+        <p:nvSpPr>
+          <p:cNvPr id="27" name="Text 24"/>
+          <p:cNvSpPr txBox="1"/>
+          <p:nvPr/>
+        </p:nvSpPr>
+        <p:spPr>
+          <a:xfrm>
+            <a:off x="8803081" y="91440"/>
+            <a:ext cx="2803398" cy="274320"/>
+          </a:xfrm>
+          <a:prstGeom prst="rect">
+            <a:avLst/>
+          </a:prstGeom>
+          <a:noFill/>
+          <a:ln/>
+        </p:spPr>
+        <p:txBody>
+          <a:bodyPr wrap="square" lIns="0" tIns="0" rIns="0" bIns="0" rtlCol="0" anchor="ctr"/>
+          <a:lstStyle/>
+          <a:p>
+            <a:pPr indent="0" marL="0">
+              <a:buNone/>
+            </a:pPr>
+            <a:r>
+              <a:rPr lang="en-US" sz="1100" b="1" dirty="0">
+                <a:solidFill>
+                  <a:srgbClr val="075985"/>
+                </a:solidFill>
+                <a:latin typeface="Calibri" pitchFamily="34" charset="0"/>
+                <a:ea typeface="Calibri" pitchFamily="34" charset="-122"/>
+                <a:cs typeface="Calibri" pitchFamily="34" charset="-120"/>
+              </a:rPr>
+              <a:t>UNDERSTAND NOW</a:t>
+            </a:r>
+            <a:pPr indent="0" marL="0">
+              <a:buNone/>
+            </a:pPr>
+            <a:r>
+              <a:rPr lang="en-US" sz="1100" dirty="0">
+                <a:solidFill>
+                  <a:srgbClr val="075985"/>
+                </a:solidFill>
+                <a:latin typeface="Calibri" pitchFamily="34" charset="0"/>
+                <a:ea typeface="Calibri" pitchFamily="34" charset="-122"/>
+                <a:cs typeface="Calibri" pitchFamily="34" charset="-120"/>
+              </a:rPr>
+              <a:t> · the processor cycle</a:t>
+            </a:r>
+            <a:endParaRPr lang="en-US" sz="1100" dirty="0"/>
           </a:p>
         </p:txBody>
       </p:sp>
@@ -24047,6 +25875,133 @@
       </p:sp>
       <p:sp>
         <p:nvSpPr>
+          <p:cNvPr id="12" name="Shape 9"/>
+          <p:cNvSpPr/>
+          <p:nvPr/>
+        </p:nvSpPr>
+        <p:spPr>
+          <a:xfrm>
+            <a:off x="8419033" y="91440"/>
+            <a:ext cx="3224022" cy="274320"/>
+          </a:xfrm>
+          <a:prstGeom prst="rect">
+            <a:avLst/>
+          </a:prstGeom>
+          <a:solidFill>
+            <a:srgbClr val="E0F2FE"/>
+          </a:solidFill>
+          <a:ln w="12700">
+            <a:solidFill>
+              <a:srgbClr val="0369A1"/>
+            </a:solidFill>
+            <a:prstDash val="solid"/>
+          </a:ln>
+        </p:spPr>
+      </p:sp>
+      <p:sp>
+        <p:nvSpPr>
+          <p:cNvPr id="13" name="Shape 10"/>
+          <p:cNvSpPr/>
+          <p:nvPr/>
+        </p:nvSpPr>
+        <p:spPr>
+          <a:xfrm>
+            <a:off x="8419033" y="91440"/>
+            <a:ext cx="73152" cy="274320"/>
+          </a:xfrm>
+          <a:prstGeom prst="rect">
+            <a:avLst/>
+          </a:prstGeom>
+          <a:solidFill>
+            <a:srgbClr val="0369A1"/>
+          </a:solidFill>
+          <a:ln w="12700">
+            <a:solidFill>
+              <a:srgbClr val="0369A1"/>
+            </a:solidFill>
+            <a:prstDash val="solid"/>
+          </a:ln>
+        </p:spPr>
+      </p:sp>
+      <p:pic>
+        <p:nvPicPr>
+          <p:cNvPr id="14" name="Image 0" descr="preencoded.png">    </p:cNvPr>
+          <p:cNvPicPr>
+            <a:picLocks noChangeAspect="1"/>
+          </p:cNvPicPr>
+          <p:nvPr/>
+        </p:nvPicPr>
+        <p:blipFill>
+          <a:blip r:embed="rId1"/>
+          <a:stretch>
+            <a:fillRect/>
+          </a:stretch>
+        </p:blipFill>
+        <p:spPr>
+          <a:xfrm>
+            <a:off x="8547049" y="128016"/>
+            <a:ext cx="201168" cy="201168"/>
+          </a:xfrm>
+          <a:prstGeom prst="rect">
+            <a:avLst/>
+          </a:prstGeom>
+        </p:spPr>
+      </p:pic>
+      <p:sp>
+        <p:nvSpPr>
+          <p:cNvPr id="15" name="Text 11"/>
+          <p:cNvSpPr txBox="1"/>
+          <p:nvPr/>
+        </p:nvSpPr>
+        <p:spPr>
+          <a:xfrm>
+            <a:off x="8803081" y="91440"/>
+            <a:ext cx="2803398" cy="274320"/>
+          </a:xfrm>
+          <a:prstGeom prst="rect">
+            <a:avLst/>
+          </a:prstGeom>
+          <a:noFill/>
+          <a:ln/>
+        </p:spPr>
+        <p:txBody>
+          <a:bodyPr wrap="square" lIns="0" tIns="0" rIns="0" bIns="0" rtlCol="0" anchor="ctr"/>
+          <a:lstStyle/>
+          <a:p>
+            <a:pPr indent="0" marL="0">
+              <a:buNone/>
+            </a:pPr>
+            <a:r>
+              <a:rPr lang="en-US" sz="1100" b="1" dirty="0">
+                <a:solidFill>
+                  <a:srgbClr val="075985"/>
+                </a:solidFill>
+                <a:latin typeface="Calibri" pitchFamily="34" charset="0"/>
+                <a:ea typeface="Calibri" pitchFamily="34" charset="-122"/>
+                <a:cs typeface="Calibri" pitchFamily="34" charset="-120"/>
+              </a:rPr>
+              <a:t>UNDERSTAND NOW</a:t>
+            </a:r>
+            <a:pPr indent="0" marL="0">
+              <a:buNone/>
+            </a:pPr>
+            <a:r>
+              <a:rPr lang="en-US" sz="1100" dirty="0">
+                <a:solidFill>
+                  <a:srgbClr val="075985"/>
+                </a:solidFill>
+                <a:latin typeface="Calibri" pitchFamily="34" charset="0"/>
+                <a:ea typeface="Calibri" pitchFamily="34" charset="-122"/>
+                <a:cs typeface="Calibri" pitchFamily="34" charset="-120"/>
+              </a:rPr>
+              <a:t> · the processor cycle</a:t>
+            </a:r>
+            <a:endParaRPr lang="en-US" sz="1100" dirty="0"/>
+          </a:p>
+        </p:txBody>
+      </p:sp>
+      <p:sp>
+        <p:nvSpPr>
           <p:cNvPr id="25" name="Slide Number Placeholder 0"/>
           <p:cNvSpPr>
             <a:spLocks noGrp="1"/>
@@ -24534,6 +26489,133 @@
       </p:sp>
       <p:sp>
         <p:nvSpPr>
+          <p:cNvPr id="14" name="Shape 12"/>
+          <p:cNvSpPr/>
+          <p:nvPr/>
+        </p:nvSpPr>
+        <p:spPr>
+          <a:xfrm>
+            <a:off x="8353374" y="91440"/>
+            <a:ext cx="3289681" cy="274320"/>
+          </a:xfrm>
+          <a:prstGeom prst="rect">
+            <a:avLst/>
+          </a:prstGeom>
+          <a:solidFill>
+            <a:srgbClr val="E0F2FE"/>
+          </a:solidFill>
+          <a:ln w="12700">
+            <a:solidFill>
+              <a:srgbClr val="0369A1"/>
+            </a:solidFill>
+            <a:prstDash val="solid"/>
+          </a:ln>
+        </p:spPr>
+      </p:sp>
+      <p:sp>
+        <p:nvSpPr>
+          <p:cNvPr id="15" name="Shape 13"/>
+          <p:cNvSpPr/>
+          <p:nvPr/>
+        </p:nvSpPr>
+        <p:spPr>
+          <a:xfrm>
+            <a:off x="8353374" y="91440"/>
+            <a:ext cx="73152" cy="274320"/>
+          </a:xfrm>
+          <a:prstGeom prst="rect">
+            <a:avLst/>
+          </a:prstGeom>
+          <a:solidFill>
+            <a:srgbClr val="0369A1"/>
+          </a:solidFill>
+          <a:ln w="12700">
+            <a:solidFill>
+              <a:srgbClr val="0369A1"/>
+            </a:solidFill>
+            <a:prstDash val="solid"/>
+          </a:ln>
+        </p:spPr>
+      </p:sp>
+      <p:pic>
+        <p:nvPicPr>
+          <p:cNvPr id="16" name="Image 0" descr="preencoded.png">    </p:cNvPr>
+          <p:cNvPicPr>
+            <a:picLocks noChangeAspect="1"/>
+          </p:cNvPicPr>
+          <p:nvPr/>
+        </p:nvPicPr>
+        <p:blipFill>
+          <a:blip r:embed="rId1"/>
+          <a:stretch>
+            <a:fillRect/>
+          </a:stretch>
+        </p:blipFill>
+        <p:spPr>
+          <a:xfrm>
+            <a:off x="8481390" y="128016"/>
+            <a:ext cx="201168" cy="201168"/>
+          </a:xfrm>
+          <a:prstGeom prst="rect">
+            <a:avLst/>
+          </a:prstGeom>
+        </p:spPr>
+      </p:pic>
+      <p:sp>
+        <p:nvSpPr>
+          <p:cNvPr id="17" name="Text 14"/>
+          <p:cNvSpPr txBox="1"/>
+          <p:nvPr/>
+        </p:nvSpPr>
+        <p:spPr>
+          <a:xfrm>
+            <a:off x="8737422" y="91440"/>
+            <a:ext cx="2869057" cy="274320"/>
+          </a:xfrm>
+          <a:prstGeom prst="rect">
+            <a:avLst/>
+          </a:prstGeom>
+          <a:noFill/>
+          <a:ln/>
+        </p:spPr>
+        <p:txBody>
+          <a:bodyPr wrap="square" lIns="0" tIns="0" rIns="0" bIns="0" rtlCol="0" anchor="ctr"/>
+          <a:lstStyle/>
+          <a:p>
+            <a:pPr indent="0" marL="0">
+              <a:buNone/>
+            </a:pPr>
+            <a:r>
+              <a:rPr lang="en-US" sz="1100" b="1" dirty="0">
+                <a:solidFill>
+                  <a:srgbClr val="075985"/>
+                </a:solidFill>
+                <a:latin typeface="Calibri" pitchFamily="34" charset="0"/>
+                <a:ea typeface="Calibri" pitchFamily="34" charset="-122"/>
+                <a:cs typeface="Calibri" pitchFamily="34" charset="-120"/>
+              </a:rPr>
+              <a:t>UNDERSTAND NOW</a:t>
+            </a:r>
+            <a:pPr indent="0" marL="0">
+              <a:buNone/>
+            </a:pPr>
+            <a:r>
+              <a:rPr lang="en-US" sz="1100" dirty="0">
+                <a:solidFill>
+                  <a:srgbClr val="075985"/>
+                </a:solidFill>
+                <a:latin typeface="Calibri" pitchFamily="34" charset="0"/>
+                <a:ea typeface="Calibri" pitchFamily="34" charset="-122"/>
+                <a:cs typeface="Calibri" pitchFamily="34" charset="-120"/>
+              </a:rPr>
+              <a:t> · interrupts and traps</a:t>
+            </a:r>
+            <a:endParaRPr lang="en-US" sz="1100" dirty="0"/>
+          </a:p>
+        </p:txBody>
+      </p:sp>
+      <p:sp>
+        <p:nvSpPr>
           <p:cNvPr id="25" name="Slide Number Placeholder 0"/>
           <p:cNvSpPr>
             <a:spLocks noGrp="1"/>
@@ -24949,6 +27031,133 @@
               <a:t>A trap is the transfer of control to a handler that follows either of them</a:t>
             </a:r>
             <a:endParaRPr lang="en-US" sz="2400" dirty="0"/>
+          </a:p>
+        </p:txBody>
+      </p:sp>
+      <p:sp>
+        <p:nvSpPr>
+          <p:cNvPr id="12" name="Shape 10"/>
+          <p:cNvSpPr/>
+          <p:nvPr/>
+        </p:nvSpPr>
+        <p:spPr>
+          <a:xfrm>
+            <a:off x="8353374" y="91440"/>
+            <a:ext cx="3289681" cy="274320"/>
+          </a:xfrm>
+          <a:prstGeom prst="rect">
+            <a:avLst/>
+          </a:prstGeom>
+          <a:solidFill>
+            <a:srgbClr val="E0F2FE"/>
+          </a:solidFill>
+          <a:ln w="12700">
+            <a:solidFill>
+              <a:srgbClr val="0369A1"/>
+            </a:solidFill>
+            <a:prstDash val="solid"/>
+          </a:ln>
+        </p:spPr>
+      </p:sp>
+      <p:sp>
+        <p:nvSpPr>
+          <p:cNvPr id="13" name="Shape 11"/>
+          <p:cNvSpPr/>
+          <p:nvPr/>
+        </p:nvSpPr>
+        <p:spPr>
+          <a:xfrm>
+            <a:off x="8353374" y="91440"/>
+            <a:ext cx="73152" cy="274320"/>
+          </a:xfrm>
+          <a:prstGeom prst="rect">
+            <a:avLst/>
+          </a:prstGeom>
+          <a:solidFill>
+            <a:srgbClr val="0369A1"/>
+          </a:solidFill>
+          <a:ln w="12700">
+            <a:solidFill>
+              <a:srgbClr val="0369A1"/>
+            </a:solidFill>
+            <a:prstDash val="solid"/>
+          </a:ln>
+        </p:spPr>
+      </p:sp>
+      <p:pic>
+        <p:nvPicPr>
+          <p:cNvPr id="14" name="Image 0" descr="preencoded.png">    </p:cNvPr>
+          <p:cNvPicPr>
+            <a:picLocks noChangeAspect="1"/>
+          </p:cNvPicPr>
+          <p:nvPr/>
+        </p:nvPicPr>
+        <p:blipFill>
+          <a:blip r:embed="rId1"/>
+          <a:stretch>
+            <a:fillRect/>
+          </a:stretch>
+        </p:blipFill>
+        <p:spPr>
+          <a:xfrm>
+            <a:off x="8481390" y="128016"/>
+            <a:ext cx="201168" cy="201168"/>
+          </a:xfrm>
+          <a:prstGeom prst="rect">
+            <a:avLst/>
+          </a:prstGeom>
+        </p:spPr>
+      </p:pic>
+      <p:sp>
+        <p:nvSpPr>
+          <p:cNvPr id="15" name="Text 12"/>
+          <p:cNvSpPr txBox="1"/>
+          <p:nvPr/>
+        </p:nvSpPr>
+        <p:spPr>
+          <a:xfrm>
+            <a:off x="8737422" y="91440"/>
+            <a:ext cx="2869057" cy="274320"/>
+          </a:xfrm>
+          <a:prstGeom prst="rect">
+            <a:avLst/>
+          </a:prstGeom>
+          <a:noFill/>
+          <a:ln/>
+        </p:spPr>
+        <p:txBody>
+          <a:bodyPr wrap="square" lIns="0" tIns="0" rIns="0" bIns="0" rtlCol="0" anchor="ctr"/>
+          <a:lstStyle/>
+          <a:p>
+            <a:pPr indent="0" marL="0">
+              <a:buNone/>
+            </a:pPr>
+            <a:r>
+              <a:rPr lang="en-US" sz="1100" b="1" dirty="0">
+                <a:solidFill>
+                  <a:srgbClr val="075985"/>
+                </a:solidFill>
+                <a:latin typeface="Calibri" pitchFamily="34" charset="0"/>
+                <a:ea typeface="Calibri" pitchFamily="34" charset="-122"/>
+                <a:cs typeface="Calibri" pitchFamily="34" charset="-120"/>
+              </a:rPr>
+              <a:t>UNDERSTAND NOW</a:t>
+            </a:r>
+            <a:pPr indent="0" marL="0">
+              <a:buNone/>
+            </a:pPr>
+            <a:r>
+              <a:rPr lang="en-US" sz="1100" dirty="0">
+                <a:solidFill>
+                  <a:srgbClr val="075985"/>
+                </a:solidFill>
+                <a:latin typeface="Calibri" pitchFamily="34" charset="0"/>
+                <a:ea typeface="Calibri" pitchFamily="34" charset="-122"/>
+                <a:cs typeface="Calibri" pitchFamily="34" charset="-120"/>
+              </a:rPr>
+              <a:t> · interrupts and traps</a:t>
+            </a:r>
+            <a:endParaRPr lang="en-US" sz="1100" dirty="0"/>
           </a:p>
         </p:txBody>
       </p:sp>

--- a/en/slides/19-Computer_Architecture-Instructions_and_Interrupts.pptx
+++ b/en/slides/19-Computer_Architecture-Instructions_and_Interrupts.pptx
@@ -126,26 +126,26 @@
   <p:extLst>
     <p:ext uri="{521415D9-36F7-43E2-AB2F-B90AF26B5E84}">
       <p14:sectionLst xmlns:p14="http://schemas.microsoft.com/office/powerpoint/2010/main">
-        <p14:section name="Opening" id="{69afaa70-9597-56d3-001c-8191b74d8ff4}">
+        <p14:section name="Opening" id="{8e73e14f-8555-80b4-01e5-5eea694c5de0}">
           <p14:sldIdLst>
             <p14:sldId id="256"/>
             <p14:sldId id="257"/>
           </p14:sldIdLst>
         </p14:section>
-        <p14:section name="Instructions" id="{f81a6806-5b8d-7df8-92af-9a764801f7db}">
+        <p14:section name="Instructions" id="{d69fb33f-9c59-3d16-9fce-0e7cae4d4240}">
           <p14:sldIdLst>
             <p14:sldId id="258"/>
             <p14:sldId id="259"/>
             <p14:sldId id="260"/>
           </p14:sldIdLst>
         </p14:section>
-        <p14:section name="The processor cycle" id="{f133f11c-f53b-8b8e-f4a4-7210691adf03}">
+        <p14:section name="The processor cycle" id="{ac162c85-e838-3097-3ed3-6275a1dfc720}">
           <p14:sldIdLst>
             <p14:sldId id="261"/>
             <p14:sldId id="262"/>
           </p14:sldIdLst>
         </p14:section>
-        <p14:section name="Interrupts" id="{4ba9ed9a-08c2-e658-62b9-cb6d2dd8e2b5}">
+        <p14:section name="Interrupts" id="{5fd2f256-5550-b1b1-ff40-2361ca21e97b}">
           <p14:sldIdLst>
             <p14:sldId id="263"/>
             <p14:sldId id="264"/>
@@ -154,7 +154,7 @@
             <p14:sldId id="267"/>
           </p14:sldIdLst>
         </p14:section>
-        <p14:section name="The RISC-V solution" id="{7f145f83-5aae-3444-4197-1832d3c61477}">
+        <p14:section name="The RISC-V solution" id="{c0c4096b-f941-85aa-f411-b4bfa2a76734}">
           <p14:sldIdLst>
             <p14:sldId id="268"/>
             <p14:sldId id="269"/>

--- a/en/slides/19-Computer_Architecture-Instructions_and_Interrupts.pptx
+++ b/en/slides/19-Computer_Architecture-Instructions_and_Interrupts.pptx
@@ -126,26 +126,26 @@
   <p:extLst>
     <p:ext uri="{521415D9-36F7-43E2-AB2F-B90AF26B5E84}">
       <p14:sectionLst xmlns:p14="http://schemas.microsoft.com/office/powerpoint/2010/main">
-        <p14:section name="Opening" id="{8e73e14f-8555-80b4-01e5-5eea694c5de0}">
+        <p14:section name="Opening" id="{e830ed6d-c410-19fa-3e2c-0ac197bdfa4b}">
           <p14:sldIdLst>
             <p14:sldId id="256"/>
             <p14:sldId id="257"/>
           </p14:sldIdLst>
         </p14:section>
-        <p14:section name="Instructions" id="{d69fb33f-9c59-3d16-9fce-0e7cae4d4240}">
+        <p14:section name="Instructions" id="{048cfa07-2265-12e5-3674-fc9025065a69}">
           <p14:sldIdLst>
             <p14:sldId id="258"/>
             <p14:sldId id="259"/>
             <p14:sldId id="260"/>
           </p14:sldIdLst>
         </p14:section>
-        <p14:section name="The processor cycle" id="{ac162c85-e838-3097-3ed3-6275a1dfc720}">
+        <p14:section name="The processor cycle" id="{c63be2a1-8033-30e5-2d5f-d32248c0937b}">
           <p14:sldIdLst>
             <p14:sldId id="261"/>
             <p14:sldId id="262"/>
           </p14:sldIdLst>
         </p14:section>
-        <p14:section name="Interrupts" id="{5fd2f256-5550-b1b1-ff40-2361ca21e97b}">
+        <p14:section name="Interrupts" id="{c13d57d2-2f97-f2a5-6c3f-4dae9cb807d1}">
           <p14:sldIdLst>
             <p14:sldId id="263"/>
             <p14:sldId id="264"/>
@@ -154,7 +154,7 @@
             <p14:sldId id="267"/>
           </p14:sldIdLst>
         </p14:section>
-        <p14:section name="The RISC-V solution" id="{c0c4096b-f941-85aa-f411-b4bfa2a76734}">
+        <p14:section name="The RISC-V solution" id="{9e7f1061-42b9-189c-0c6a-2384ffd00226}">
           <p14:sldIdLst>
             <p14:sldId id="268"/>
             <p14:sldId id="269"/>
@@ -570,7 +570,7 @@
           <a:p>
             <a:r>
               <a:rPr lang="en-US" dirty="0"/>
-              <a:t>The previous lecture described what a processor is made of. This one describes what it does. It has two halves. The first follows a single instruction: how it is encoded in 32 bits and which steps the processor takes to carry it out. The second explains what happens when something more urgent than the current program arrives, a timer, a device, an error, and the processor must leave what it is doing and come back later. The joke on the cover is nearly true, as you will see.
+              <a:t>The previous lecture described what a processor is made of; this one describes what it does. It has two halves. The first follows a single instruction: how it is encoded in 32 bits and which steps the processor takes to execute it. The second explains what happens when something more urgent than the current program arrives, a timer, a device or an error, so that the processor must suspend its work and resume it later. The two halves are connected: the interrupt is a modification of the very cycle the first half describes. The joke on the cover, as will become apparent, is nearly literally true.
 Learning status: UNDERSTAND NOW, by the end of this lecture you explain it, trace it and apply it on your own; USE NOW, you follow and use the recipe today; how it works inside is explained later, or is not part of the course; UNDERSTAND LATER, recognise the name and what it is for; a later lecture explains it. A slide without a badge is context: a story, an example, a question, an exercise.
 Learning status of this lecture. UNDERSTAND NOW: instruction formats; addressing modes; the processor cycle; interrupts and traps. USE NOW: the complete program, the PRG32 tools (used, not studied, in this course). UNDERSTAND LATER: nothing. A slide without a badge is context: a story, an example, a question, an exercise.
 For the lecturer: The original deck used a 16-bit word machine for the fetch phase and the Motorola MC68000 for vectored interrupts and priorities. Both are replaced by RISC-V: the six instruction formats, the five classic stages, and the machine-mode trap mechanism (mtvec, mepc, mcause, mstatus, mret). A comparison slide keeps the 68000 as the historical counterpart.</a:t>
@@ -661,7 +661,7 @@
           <a:p>
             <a:r>
               <a:rPr lang="en-US" dirty="0"/>
-              <a:t>The real cycle. After the bootstrap the processor fetches, decodes and executes; then, at the end of every instruction, it checks whether an interrupt is pending. If not, it goes back to fetch. If so, it takes the trap: it passes to the privileged state and starts executing a routine of the system, the handler. When the handler finishes, the suspended program resumes as if nothing had happened. Follow the two paths on the diagram: the short loop is the normal case.
+              <a:t>The real cycle. After the bootstrap the processor fetches, decodes and executes; then, at the end of every instruction, it checks whether an interrupt is pending. If none is, it returns to fetch. If one is, it takes the trap: it enters the privileged state and begins executing a system routine, the handler. When the handler completes, the suspended program resumes as though nothing had occurred. The two paths on the diagram should be followed; the short loop is the common case.
 UNDERSTAND NOW: interrupts and traps.
 For the lecturer: Ciclo del processore reale. In RISC-V 'supervisor state' is machine mode, and the first instruction fetched after the trap is the one at the address in mtvec.</a:t>
             </a:r>
@@ -751,7 +751,7 @@
           <a:p>
             <a:r>
               <a:rPr lang="en-US" dirty="0"/>
-              <a:t>Six causes of interruption. A periodic interrupt from a timer, to share the processor among programs. An I/O interrupt, with which a peripheral reports that it is ready. Errors in the program, such as an instruction that does not exist: these are the exceptions. Faults of the system: power, temperature. Reset, which brings everything back to a known state. And the software interrupt, with which a program asks the operating system for a service: in RISC-V it is the instruction ecall.
+              <a:t>Six causes of interruption. A periodic interrupt from a timer, used to share the processor among programs. An I/O interrupt, by which a peripheral signals that it is ready. Program errors, such as an instruction that does not exist: these are the exceptions. System faults: power, temperature. Reset, which returns everything to a known state. And the software interrupt, by which a program requests a service from the operating system: in RISC-V, the instruction ecall.
 UNDERSTAND NOW: interrupts and traps.
 For the lecturer: The original deck lists arithmetic overflow among the program errors: in RISC-V integer overflow does not raise an exception (Lecture 05). ecall, environment call, is synchronous with the program that executes it.</a:t>
             </a:r>
@@ -841,7 +841,7 @@
           <a:p>
             <a:r>
               <a:rPr lang="en-US" dirty="0"/>
-              <a:t>The general procedure in six steps. Save the context, hardware part: at least the address at which to resume. Identify the cause. Jump to the entry point of the interrupt service routine. Save the context, software part: the registers the routine is going to use. Serve the interrupt. Finally restore the context and resume the suspended program at the instruction after the last one executed. The context is everything that the interrupted program needs to find unchanged.
+              <a:t>The general procedure in six steps. Save the context, hardware part: at minimum the address at which to resume. Identify the cause. Jump to the entry point of the interrupt service routine. Save the context, software part: the registers the routine will use. Serve the interrupt. Finally, restore the context and resume the suspended program at the instruction following the last one executed. The context is everything the interrupted program requires to find unchanged, and its preservation is what makes the interruption invisible.
 UNDERSTAND NOW: interrupts and traps.
 For the lecturer: Gestione delle interruzioni. The state to save and restore: PC, status, and the registers. Saving can be done partly or wholly in hardware or in software; RISC-V does the minimum in hardware. With several devices the processor must identify who interrupted and, for simultaneous requests, apply a priority.</a:t>
             </a:r>
@@ -931,7 +931,7 @@
           <a:p>
             <a:r>
               <a:rPr lang="en-US" dirty="0"/>
-              <a:t>Six registers. mtvec, written once by the firmware, holds the address of the trap handler. mstatus contains MIE, the global interrupt enable, and MPIE, its previous value. mie has one enable bit for each source, mip one pending bit for each source. mepc receives, at each trap, the address of the interrupted instruction. mcause receives the cause. The middle column matters: some registers are written by the firmware to configure the mechanism, others by the hardware when a trap occurs.
+              <a:t>Six registers. mtvec, written once by the firmware, holds the address of the trap handler. mstatus contains MIE, the global interrupt enable, and MPIE, its previous value. mie holds one enable bit per source, mip one pending bit per source. mepc receives, at each trap, the address of the interrupted instruction. mcause receives the cause. The middle column deserves attention: some registers are written by the firmware to configure the mechanism, others by the hardware when a trap occurs.
 UNDERSTAND NOW: interrupts and traps.
 For the lecturer: Machine-mode control and status registers (Lecture 18). An interrupt is taken only if its bit is set in both mip and mie and MIE is 1.</a:t>
             </a:r>
@@ -1021,7 +1021,7 @@
           <a:p>
             <a:r>
               <a:rPr lang="en-US" dirty="0"/>
-              <a:t>What the hardware does at a trap, in order. It writes in mepc the address of the interrupted instruction. It writes the cause in mcause. It copies MIE into MPIE and clears MIE, so that further interrupts are disabled. It passes to machine mode. It loads the PC with the address in mtvec. Nothing is saved on a stack: the general registers are left to the handler. The instruction mret, at the end of the handler, undoes everything: MIE gets MPIE back and the PC gets mepc.
+              <a:t>The actions of the hardware at a trap, in order. It writes into mepc the address of the interrupted instruction. It writes the cause into mcause. It copies MIE into MPIE and clears MIE, disabling further interrupts. It enters machine mode. It loads the PC with the address in mtvec. Nothing is saved on a stack: the general registers are left to the handler, consistently with the absence of hidden state noted in Lecture 18. The instruction mret, at the end of the handler, reverses everything: MIE recovers MPIE and the PC recovers mepc.
 UNDERSTAND NOW: interrupts and traps.
 For the lecturer: Nothing is pushed on a stack by the hardware: saving the general registers is left to the handler. This is the 'hardware context save' of the general scheme, reduced to two registers and one bit.</a:t>
             </a:r>
@@ -1111,7 +1111,7 @@
           <a:p>
             <a:r>
               <a:rPr lang="en-US" dirty="0"/>
-              <a:t>The content of mcause. The top bit says whether it was an interrupt or an exception; the rest is a code. The three interrupts, highlighted: software, timer, and external, that is a device. Among the exceptions: illegal instruction, breakpoint, access fault on a load or a store, and ecall. The same number can appear in both families with different meanings, which is why the top bit is needed. The breakpoint row explains how a debugger such as that of PRG32-QT stops your program.
+              <a:t>The content of mcause. The top bit indicates whether the trap was an interrupt or an exception; the remaining bits are a code. The three interrupts, highlighted, are software, timer and external, that is, a device. Among the exceptions are illegal instruction, breakpoint, access fault on a load or store, and ecall. The same number may appear in both families with different meanings, which is why the top bit is needed. The breakpoint row explains how a debugger such as that of PRG32-QT halts a program.
 UNDERSTAND NOW: interrupts and traps.
 For the lecturer: The standard codes of the privileged specification; chips add their own. The same code 3 means different things for interrupts and exceptions: the top bit of mcause distinguishes them. With mtvec in vectored mode, a timer interrupt enters at base + 4 x 7.</a:t>
             </a:r>
@@ -1201,7 +1201,7 @@
           <a:p>
             <a:r>
               <a:rPr lang="en-US" dirty="0"/>
-              <a:t>All of this happens on the kit. A timer interrupts the processor a hundred times per second, and the firmware uses it to keep time and pace the frames. The display and the audio interrupt when they want more data. The radio interrupts when a packet arrives, which is why you can upload a cartridge while a game runs. Your init, update and draw are ordinary functions that run between interrupts. And a cartridge stuck in a loop does not stop the interrupts: PRG32-QT reports an error; on the board a watchdog reports the stall.
+              <a:t>All of this takes place on the kit. A timer interrupts the processor a hundred times per second, and the firmware uses it to keep time and pace the frames. The display and the audio interrupt when they require more data. The radio interrupts when a packet arrives, which is why a cartridge can be uploaded while a game runs. The functions init, update and draw are ordinary functions executed between interrupts. And a cartridge caught in a loop does not stop the interrupts: PRG32-QT reports an error, and on the board a watchdog reports the stall.
 UNDERSTAND NOW: interrupts and traps.
 For the lecturer: The three problems of the simple cycle (inefficient I/O, runaway programs, limited control) and their solution, all visible on the kit. Checked against the firmware sources and configuration (not on a physical board): the cartridge runs natively inside the main task, in the same privilege mode as the firmware; FreeRTOS ticks at 100 Hz; the task watchdog (5 s, watching the idle task) only prints a warning on the serial port, because the panic option is off, so a stuck cartridge keeps the cartridge lock and the kit needs a reset. A cartridge that disabled interrupts would instead trip the interrupt watchdog (300 ms), which panics and restarts the chip. Run on PRG32-QT: an endless loop gives 'instruction budget exhausted', a write to mstatus gives 'unsupported CSR'. In PRG32-QT a breakpoint is the exception with code 3.</a:t>
             </a:r>
@@ -1291,8 +1291,8 @@
           <a:p>
             <a:r>
               <a:rPr lang="en-US" dirty="0"/>
-              <a:t>Look again at the slide of the formats: one field is in the same place in all four rows.
-Addresses count bytes. How many bytes does a 32-bit instruction occupy?
+              <a:t>For the first question one returns to the slide of the formats: one field occupies the same position in all four rows.
+For the second: addresses count bytes, and the question is how many bytes a 32-bit instruction occupies.
 For the lecturer: 1. Answer: B. Bits 6 to 0, in every format: the processor always knows where to look first.
 2. Answer: C. Addresses count bytes and an instruction is four bytes long.</a:t>
             </a:r>
@@ -1382,8 +1382,8 @@
           <a:p>
             <a:r>
               <a:rPr lang="en-US" dirty="0"/>
-              <a:t>Four registers are in play: one holds the address of the handler, one the cause, one the address at which to resume. ra belongs to function calls, not to traps.
-Use the definition: an exception is caused by the instruction being executed, an interrupt comes from outside at an arbitrary moment. Three of the four events come from outside.
+              <a:t>For the first question, four registers are involved: one holds the address of the handler, one the cause, one the address at which to resume. ra belongs to procedure calls, not to traps.
+For the second, the definition applies: an exception is caused by the instruction being executed, whereas an interrupt arrives from outside at an arbitrary moment. Three of the four events originate outside the program.
 For the lecturer: 1. Answer: C. mepc, written by the hardware at the trap and used by mret. mtvec holds the address of the handler.
 2. Answer: C. It is caused by the instruction being executed, synchronously; the others come from outside, at any moment.</a:t>
             </a:r>
@@ -1473,7 +1473,7 @@
           <a:p>
             <a:r>
               <a:rPr lang="en-US" dirty="0"/>
-              <a:t>Twelve terms. The operation code is the codice operativo; an addressing mode is a modo di indirizzamento. Fetch, decode and execute are prelievo, decodifica and esecuzione. The interrupt service routine is the routine that serves an interrupt. Interrupt latency is the delay between the request and the start of useful work. To mask an interrupt is to prevent it temporarily from being accepted.</a:t>
+              <a:t>Twelve terms. The operation code is the codice operativo; an addressing mode is a modo di indirizzamento. Fetch, decode and execute are prelievo, decodifica and esecuzione. The interrupt service routine is the routine that serves an interrupt. Interrupt latency is the delay between the request and the start of useful work. To mask an interrupt is to prevent its acceptance temporarily.</a:t>
             </a:r>
             <a:endParaRPr lang="en-US" dirty="0"/>
           </a:p>
@@ -1561,7 +1561,7 @@
           <a:p>
             <a:r>
               <a:rPr lang="en-US" dirty="0"/>
-              <a:t>Six objectives. Describe an instruction as an operation code with operands. Decode a RISC-V instruction by hand. Follow an instruction through the five phases of the processor cycle. Explain what a pipeline is and why it speeds a processor up. Define interrupt, exception and trap, three words that RISC-V uses precisely. And describe what the hardware does at a trap and how the interrupted program resumes.</a:t>
+              <a:t>Six learning outcomes. Describing an instruction as an operation code with operands. Decoding a RISC-V instruction by hand. Following an instruction through the five phases of the processor cycle. Explaining what a pipeline is and why it increases throughput. Defining interrupt, exception and trap, three terms that RISC-V uses with precision. And describing what the hardware does at a trap and how the interrupted program resumes.</a:t>
             </a:r>
             <a:endParaRPr lang="en-US" dirty="0"/>
           </a:p>
@@ -1649,7 +1649,7 @@
           <a:p>
             <a:r>
               <a:rPr lang="en-US" dirty="0"/>
-              <a:t>Five conclusions. An instruction is an operation code and its operands; in RISC-V always 32 bits in six regular formats. A fixed length keeps the fetch simple: the PC advances by a constant, 4 for an instruction that is not compressed. The processor has a cycle: fetch, decode, execute, write the result. Exceptional events break the cycle: the processor saves where it was, serves the event and resumes. Interrupts can be enabled, masked and ordered by priority, and RISC-V does it with a handful of registers and mret. The next lecture leaves the processor for the buses and the video card.
+              <a:t>Five conclusions. An instruction is an operation code with its operands; in RISC-V it is always 32 bits long, in six regular formats, unless compressed. A fixed length keeps the fetch simple: the PC advances by a constant, 4 for an uncompressed instruction. The processor executes a cycle: fetch, decode, execute, write the result. Exceptional events interrupt the cycle: the processor records where it was, serves the event and resumes. Interrupts can be enabled, masked and prioritised, and RISC-V achieves all of this with a handful of registers and mret. The next lecture leaves the processor for the buses and the video card.
 Learning status, recap. UNDERSTAND NOW: instruction formats; addressing modes; the processor cycle; interrupts and traps. USE NOW: the complete program, the PRG32 tools (used, not studied, in this course). UNDERSTAND LATER: nothing. A slide without a badge is context: a story, an example, a question, an exercise.
 For the lecturer: The original conclusions stated that 'the interrupt is a non-maskable signal': most interrupts can be masked; only a few cannot. Next lecture: buses and the video card.</a:t>
             </a:r>
@@ -1739,7 +1739,7 @@
           <a:p>
             <a:r>
               <a:rPr lang="en-US" dirty="0"/>
-              <a:t>Every processor has four families of instructions: transfers between memory and registers, arithmetic and logic, control of flow, and input/output. An instruction is an operation code, the opcode, which says what to do, followed by zero or more operands, which say on what. An operand can be a constant written inside the instruction, an immediate; a memory location; or a register. Some operands are implicit: an accumulator machine does not name the accumulator. Instructions have from zero to three operands.
+              <a:t>Every processor provides four families of instructions: transfers between memory and registers, arithmetic and logical operations, control of flow, and input/output. An instruction consists of an operation code, the opcode, specifying what to do, followed by zero or more operands, specifying on what. An operand may be a constant written within the instruction, an immediate; a memory location; or a register. Some operands are implicit, as the accumulator is in an accumulator machine. Instructions have from zero to three operands.
 UNDERSTAND NOW: instruction formats.
 For the lecturer: In RISC-V the fourth family does not exist as such: devices are memory (Lecture 15). add has three operands, all registers; ret has none visible.</a:t>
             </a:r>
@@ -1829,7 +1829,7 @@
           <a:p>
             <a:r>
               <a:rPr lang="en-US" dirty="0"/>
-              <a:t>The formats of RISC-V. All instructions are 32 bits long, divided into fields. In the R format, for operations between registers, there are three register numbers of five bits, rs1, rs2 and rd, and three fields that select the operation. In the I format the second source register is replaced by a 12-bit immediate. S and B, for stores and branches, split the immediate in two pieces. U and J carry a 20-bit immediate. Notice the regularity: the opcode is always in the lowest seven bits, and the registers are always in the same positions.
+              <a:t>The instruction formats of RISC-V. Every instruction is 32 bits long and divided into fields. In the R format, for register-to-register operations, there are three five-bit register numbers, rs1, rs2 and rd, and three fields that select the operation. In the I format the second source register is replaced by a 12-bit immediate. S and B, for stores and branches, split the immediate into two pieces. U and J carry a 20-bit immediate. The regularity is a design objective: the opcode always occupies the lowest seven bits and the register fields always the same positions, so decoding can begin before the format is known. The 16-bit compressed forms of the C extension are only named here; Appendix A of the textbook lists them.
 UNDERSTAND NOW: instruction formats.
 For the lecturer: Bits 31 down to 0, left to right (indices shown on the first row). B and J differ from S and U only in how the bits of the immediate are arranged. This regularity is the heart of the RISC idea; the generic 0-, 1-, 2- and 3-operand formats of the original deck are its ancestors.</a:t>
             </a:r>
@@ -1919,7 +1919,7 @@
           <a:p>
             <a:r>
               <a:rPr lang="en-US" dirty="0"/>
-              <a:t>An addressing mode is a way of finding an operand. RISC-V has four. Immediate: the operand is a constant inside the instruction. Register: it is the content of a register. Base plus displacement: it is the memory word at the address given by a register plus a constant, the only way to reach memory. PC-relative: an address at a certain distance from the instruction itself, used by branches. Memory-indirect addressing, where the address itself is in memory, does not exist: it takes two loads.
+              <a:t>An addressing mode is a method of locating an operand. RISC-V provides four. Immediate: the operand is a constant within the instruction. Register: it is the content of a register. Base plus displacement: it is the memory word at the address formed by a register plus a constant, the only means of reaching memory. PC-relative: an address at a given distance from the instruction itself, used by branches. Memory-indirect addressing, in which the address itself resides in memory, does not exist: it requires two loads. This is the formal treatment promised in Lecture 02 when address and value were first distinguished.
 UNDERSTAND NOW: addressing modes.
 For the lecturer: RISC-V has only the first four. A CISC processor such as the MC68000 has a dozen, including memory-indirect and auto-increment modes. The example of the original deck, R3 := M[M[A]], becomes in RISC-V: lw t0, 0(t1) followed by lw t0, 0(t0). The 'operand assembly' phase of a CISC processor is the price of rich addressing modes.</a:t>
             </a:r>
@@ -2009,7 +2009,7 @@
           <a:p>
             <a:r>
               <a:rPr lang="en-US" dirty="0"/>
-              <a:t>Five phases. Fetch: the instruction at the address in the PC is read from memory, and the PC advances. Decode: the opcode is recognised and the registers named in the instruction are read. Execute: the ALU computes a result, an address or a comparison. Memory: loads read the memory, stores write it, the other instructions do nothing here. Write back: the result is written in the destination register. After the initial bootstrap, the processor repeats this cycle for ever.
+              <a:t>Five phases. Fetch: the instruction at the address in the PC is read from memory and the PC advanced. Decode: the opcode is recognised and the registers named in the instruction are read. Execute: the ALU computes a result, an address or a comparison. Memory: loads read memory, stores write it, and other instructions do nothing in this phase. Write back: the result is written into the destination register. After the initial bootstrap the processor repeats this cycle indefinitely.
 UNDERSTAND NOW: the processor cycle.
 For the lecturer: Algoritmo fondamentale del processore: inizializzazione, instruction fetch and decoding, operand assembly, execute. The five-phase version is the classic RISC formulation.</a:t>
             </a:r>
@@ -2099,7 +2099,7 @@
           <a:p>
             <a:r>
               <a:rPr lang="en-US" dirty="0"/>
-              <a:t>If each phase has its own hardware, the phases of different instructions can overlap. In the table, each row is an instruction and each column a clock cycle: while the first instruction is in execution, the second is being decoded and the third fetched. Each instruction still takes five cycles, but one finishes at every cycle: this is the pipeline, the same idea as an assembly line. Superscalar processors put several pipelines side by side. The main core of the kit has a pipeline of four stages.
+              <a:t>If each phase has dedicated hardware, the phases of successive instructions can overlap. In the table each row is an instruction and each column a clock cycle: while the first instruction executes, the second is decoded and the third fetched. Each instruction still requires five cycles, but one completes every cycle: this is the pipeline, the principle of the assembly line, which increases throughput without reducing latency. Superscalar processors place several pipelines side by side, as Lecture 24 shows. The main core of the kit has a four-stage pipeline.
 UNDERSTAND NOW: the processor cycle.
 For the lecturer: Source slide: «Esempio di pipeline lineare a 5 stadi; superscalarità». IF instruction fetch, ID decode, EX execute, MEM memory, WB write back. Branches and dependences between neighbouring instructions complicate the picture (hazards): the subject of an advanced course.</a:t>
             </a:r>
@@ -2189,7 +2189,7 @@
           <a:p>
             <a:r>
               <a:rPr lang="en-US" dirty="0"/>
-              <a:t>A processor that only fetched, decoded and executed would have three problems. Communication with devices would be inefficient: the program would have to keep asking each device whether it has something to say. A program that entered an endless loop by mistake, like the j loop on the slide, could never be removed. And the operating system would have little control over the machine. All three have the same solution: a way to take the processor away from the running program.
+              <a:t>A processor that did nothing but fetch, decode and execute would face three problems. Communication with devices would be inefficient, since the program would have to interrogate each device repeatedly. A program trapped by mistake in an endless loop, such as the j loop on the slide, could never be removed. And the operating system would have little control over the machine. All three share one solution: a mechanism for taking the processor away from the running program.
 UNDERSTAND NOW: interrupts and traps.
 For the lecturer: Source slide: «Ciclo del processore semplificato»: bootstrap, fetch, operand assembly, execute.</a:t>
             </a:r>
@@ -2279,7 +2279,7 @@
           <a:p>
             <a:r>
               <a:rPr lang="en-US" dirty="0"/>
-              <a:t>The definition: interrupts are exceptional events, usually asynchronous with respect to the program in execution, that require the attention of the processor. RISC-V uses three distinct words. An interrupt comes from outside the program, at any moment: a timer, a device. An exception is caused by the instruction being executed: an illegal opcode, a forbidden address. A trap is the transfer of control to a handler, whatever caused it. Other processors use these words more loosely.
+              <a:t>The definition: interrupts are exceptional events, usually asynchronous with respect to the executing program, that require the attention of the processor. RISC-V distinguishes three terms. An interrupt originates outside the program and may arrive at any moment: a timer, a device. An exception is caused by the instruction being executed: an illegal opcode, a forbidden address. A trap is the transfer of control to a handler, whatever its cause. Other architectures use these words less strictly, so the RISC-V usage is worth adopting for its clarity.
 UNDERSTAND NOW: interrupts and traps.
 For the lecturer: Interrupt o interruzioni. Older processors and the original deck call 'traps' the synchronous events and use 'interrupt' for everything; the RISC-V specification uses the three words precisely.</a:t>
             </a:r>
@@ -3359,7 +3359,7 @@
                 <a:ea typeface="Calibri" pitchFamily="34" charset="-122"/>
                 <a:cs typeface="Calibri" pitchFamily="34" charset="-120"/>
               </a:rPr>
-              <a:t>19-Computer_Architecture-Instructions_and_Interrupts-Code.pptx</a:t>
+              <a:t>19-Computer_Architecture-Instructions_and_Interrupts-Lab.pptx</a:t>
             </a:r>
             <a:endParaRPr lang="en-US" sz="1300" dirty="0"/>
           </a:p>

--- a/en/slides/19-Computer_Architecture-Instructions_and_Interrupts.pptx
+++ b/en/slides/19-Computer_Architecture-Instructions_and_Interrupts.pptx
@@ -126,26 +126,26 @@
   <p:extLst>
     <p:ext uri="{521415D9-36F7-43E2-AB2F-B90AF26B5E84}">
       <p14:sectionLst xmlns:p14="http://schemas.microsoft.com/office/powerpoint/2010/main">
-        <p14:section name="Opening" id="{e830ed6d-c410-19fa-3e2c-0ac197bdfa4b}">
+        <p14:section name="Opening" id="{8c46cda7-ed35-4421-9d64-c090500c435f}">
           <p14:sldIdLst>
             <p14:sldId id="256"/>
             <p14:sldId id="257"/>
           </p14:sldIdLst>
         </p14:section>
-        <p14:section name="Instructions" id="{048cfa07-2265-12e5-3674-fc9025065a69}">
+        <p14:section name="Instructions" id="{7fa80d2c-cb3f-c5e0-fe33-119cf56cc4e5}">
           <p14:sldIdLst>
             <p14:sldId id="258"/>
             <p14:sldId id="259"/>
             <p14:sldId id="260"/>
           </p14:sldIdLst>
         </p14:section>
-        <p14:section name="The processor cycle" id="{c63be2a1-8033-30e5-2d5f-d32248c0937b}">
+        <p14:section name="The processor cycle" id="{da115774-a42c-06af-bbba-9fc9fb5846a4}">
           <p14:sldIdLst>
             <p14:sldId id="261"/>
             <p14:sldId id="262"/>
           </p14:sldIdLst>
         </p14:section>
-        <p14:section name="Interrupts" id="{c13d57d2-2f97-f2a5-6c3f-4dae9cb807d1}">
+        <p14:section name="Interrupts" id="{b0bdfc70-9654-24ca-9267-ffa83751e5d6}">
           <p14:sldIdLst>
             <p14:sldId id="263"/>
             <p14:sldId id="264"/>
@@ -154,7 +154,7 @@
             <p14:sldId id="267"/>
           </p14:sldIdLst>
         </p14:section>
-        <p14:section name="The RISC-V solution" id="{9e7f1061-42b9-189c-0c6a-2384ffd00226}">
+        <p14:section name="The RISC-V solution" id="{63a913a5-d1e9-e420-4b65-9e85a5cdee54}">
           <p14:sldIdLst>
             <p14:sldId id="268"/>
             <p14:sldId id="269"/>

--- a/en/slides/19-Computer_Architecture-Instructions_and_Interrupts.pptx
+++ b/en/slides/19-Computer_Architecture-Instructions_and_Interrupts.pptx
@@ -126,26 +126,26 @@
   <p:extLst>
     <p:ext uri="{521415D9-36F7-43E2-AB2F-B90AF26B5E84}">
       <p14:sectionLst xmlns:p14="http://schemas.microsoft.com/office/powerpoint/2010/main">
-        <p14:section name="Opening" id="{8c46cda7-ed35-4421-9d64-c090500c435f}">
+        <p14:section name="Opening" id="{3ec4a24b-7393-d37f-2175-4de24c2136ae}">
           <p14:sldIdLst>
             <p14:sldId id="256"/>
             <p14:sldId id="257"/>
           </p14:sldIdLst>
         </p14:section>
-        <p14:section name="Instructions" id="{7fa80d2c-cb3f-c5e0-fe33-119cf56cc4e5}">
+        <p14:section name="Instructions" id="{4c154499-c08f-cced-c765-f2ce0439759f}">
           <p14:sldIdLst>
             <p14:sldId id="258"/>
             <p14:sldId id="259"/>
             <p14:sldId id="260"/>
           </p14:sldIdLst>
         </p14:section>
-        <p14:section name="The processor cycle" id="{da115774-a42c-06af-bbba-9fc9fb5846a4}">
+        <p14:section name="The processor cycle" id="{d4227bad-7105-a934-1f3e-322431863077}">
           <p14:sldIdLst>
             <p14:sldId id="261"/>
             <p14:sldId id="262"/>
           </p14:sldIdLst>
         </p14:section>
-        <p14:section name="Interrupts" id="{b0bdfc70-9654-24ca-9267-ffa83751e5d6}">
+        <p14:section name="Interrupts" id="{bf1e2dfb-0021-0e50-9c51-75770464c375}">
           <p14:sldIdLst>
             <p14:sldId id="263"/>
             <p14:sldId id="264"/>
@@ -154,7 +154,7 @@
             <p14:sldId id="267"/>
           </p14:sldIdLst>
         </p14:section>
-        <p14:section name="The RISC-V solution" id="{63a913a5-d1e9-e420-4b65-9e85a5cdee54}">
+        <p14:section name="The RISC-V solution" id="{59a482ae-89f9-884c-e62f-c55690eb1374}">
           <p14:sldIdLst>
             <p14:sldId id="268"/>
             <p14:sldId id="269"/>
@@ -573,6 +573,7 @@
               <a:t>The previous lecture described what a processor is made of; this one describes what it does. It has two halves. The first follows a single instruction: how it is encoded in 32 bits and which steps the processor takes to execute it. The second explains what happens when something more urgent than the current program arrives, a timer, a device or an error, so that the processor must suspend its work and resume it later. The two halves are connected: the interrupt is a modification of the very cycle the first half describes. The joke on the cover, as will become apparent, is nearly literally true.
 Learning status: UNDERSTAND NOW, by the end of this lecture you explain it, trace it and apply it on your own; USE NOW, you follow and use the recipe today; how it works inside is explained later, or is not part of the course; UNDERSTAND LATER, recognise the name and what it is for; a later lecture explains it. A slide without a badge is context: a story, an example, a question, an exercise.
 Learning status of this lecture. UNDERSTAND NOW: instruction formats; addressing modes; the processor cycle; interrupts and traps. USE NOW: the complete program, the PRG32 tools (used, not studied, in this course). UNDERSTAND LATER: nothing. A slide without a badge is context: a story, an example, a question, an exercise.
+Roadmap. Today's outcomes: (1) decode a RISC-V instruction into its fields; (2) name the addressing mode of each operand; (3) describe the instruction cycle and what an interrupt changes. Builds on: only what Lecture 01 set up. Next: Lecture 20, Buses and the Video Card.
 For the lecturer: The original deck used a 16-bit word machine for the fetch phase and the Motorola MC68000 for vectored interrupts and priorities. Both are replaced by RISC-V: the six instruction formats, the five classic stages, and the machine-mode trap mechanism (mtvec, mepc, mcause, mstatus, mret). A comparison slide keeps the 68000 as the historical counterpart.</a:t>
             </a:r>
             <a:endParaRPr lang="en-US" dirty="0"/>
@@ -1650,7 +1651,7 @@
             <a:r>
               <a:rPr lang="en-US" dirty="0"/>
               <a:t>Five conclusions. An instruction is an operation code with its operands; in RISC-V it is always 32 bits long, in six regular formats, unless compressed. A fixed length keeps the fetch simple: the PC advances by a constant, 4 for an uncompressed instruction. The processor executes a cycle: fetch, decode, execute, write the result. Exceptional events interrupt the cycle: the processor records where it was, serves the event and resumes. Interrupts can be enabled, masked and prioritised, and RISC-V achieves all of this with a handful of registers and mret. The next lecture leaves the processor for the buses and the video card.
-Learning status, recap. UNDERSTAND NOW: instruction formats; addressing modes; the processor cycle; interrupts and traps. USE NOW: the complete program, the PRG32 tools (used, not studied, in this course). UNDERSTAND LATER: nothing. A slide without a badge is context: a story, an example, a question, an exercise.
+Learning status, recap. UNDERSTAND NOW: instruction formats; addressing modes; the processor cycle; interrupts and traps. USE NOW: the complete program, the PRG32 tools (used, not studied, in this course). UNDERSTAND LATER: nothing. A slide without a badge is context: a story, an example, a question, an exercise. Closing thread: The number 0x00130313 of Lecture 02 can now be read field by field, and the processor that fetches it can be interrupted and resumed. Next: the devices that the processor serves. Exit ticket (two to four minutes, alone, on paper): 1. Name the addressing mode of: the 1 in addi t1, t1, 1; the word read by lw t1, 8(sp); the target of beq t0, t1, loop; the operand t0 of add t2, t0, t1. 2. An interrupt arrives while the processor is executing an instruction. What happens to that instruction, which register remembers where to resume, and how does the handler end?
 For the lecturer: The original conclusions stated that 'the interrupt is a non-maskable signal': most interrupts can be masked; only a few cannot. Next lecture: buses and the video card.</a:t>
             </a:r>
             <a:endParaRPr lang="en-US" dirty="0"/>
